--- a/assets/figures-editable/c3-c4/c4-e09.pptx
+++ b/assets/figures-editable/c3-c4/c4-e09.pptx
@@ -3104,8 +3104,8 @@
         </p:nvSpPr>
         <p:spPr>
           <a:xfrm>
-            <a:off x="274320" y="137160"/>
-            <a:ext cx="11612880" cy="365760"/>
+            <a:off x="274320" y="118872"/>
+            <a:ext cx="11612880" cy="340105"/>
           </a:xfrm>
           <a:prstGeom prst="rect">
             <a:avLst/>
@@ -3114,7 +3114,7 @@
           <a:effectLst/>
         </p:spPr>
         <p:txBody>
-          <a:bodyPr wrap="square" lIns="27432" rIns="27432" tIns="18288" bIns="18288" anchor="ctr">
+          <a:bodyPr wrap="none" lIns="18288" rIns="18288" tIns="18288" bIns="18288" anchor="t">
             <a:spAutoFit/>
           </a:bodyPr>
           <a:lstStyle/>
@@ -3125,7 +3125,7 @@
               </a:spcAft>
             </a:pPr>
             <a:r>
-              <a:rPr sz="2100" b="0" i="0">
+              <a:rPr sz="1900" b="1" i="0">
                 <a:solidFill>
                   <a:srgbClr val="8EDBD4"/>
                 </a:solidFill>
@@ -3144,13 +3144,13 @@
         </p:nvCxnSpPr>
         <p:spPr>
           <a:xfrm>
-            <a:off x="914400" y="2468880"/>
-            <a:ext cx="8229600" cy="0"/>
+            <a:off x="914400" y="4846320"/>
+            <a:ext cx="5486400" cy="0"/>
           </a:xfrm>
           <a:prstGeom prst="line">
             <a:avLst/>
           </a:prstGeom>
-          <a:ln w="25400">
+          <a:ln w="19050">
             <a:solidFill>
               <a:srgbClr val="B4C7D2"/>
             </a:solidFill>
@@ -3165,16 +3165,16 @@
           <p:nvPr/>
         </p:nvCxnSpPr>
         <p:spPr>
-          <a:xfrm flipV="1">
-            <a:off x="1097280" y="2467682"/>
-            <a:ext cx="96012" cy="1198"/>
+          <a:xfrm>
+            <a:off x="914400" y="1371600"/>
+            <a:ext cx="0" cy="3474720"/>
           </a:xfrm>
           <a:prstGeom prst="line">
             <a:avLst/>
           </a:prstGeom>
-          <a:ln w="25400">
+          <a:ln w="19050">
             <a:solidFill>
-              <a:srgbClr val="8EDBD4"/>
+              <a:srgbClr val="B4C7D2"/>
             </a:solidFill>
           </a:ln>
           <a:effectLst/>
@@ -3187,16 +3187,16 @@
           <p:nvPr/>
         </p:nvCxnSpPr>
         <p:spPr>
-          <a:xfrm flipV="1">
-            <a:off x="1193292" y="2464095"/>
-            <a:ext cx="96012" cy="3587"/>
+          <a:xfrm>
+            <a:off x="914400" y="4846320"/>
+            <a:ext cx="0" cy="64008"/>
           </a:xfrm>
           <a:prstGeom prst="line">
             <a:avLst/>
           </a:prstGeom>
-          <a:ln w="25400">
+          <a:ln w="12700">
             <a:solidFill>
-              <a:srgbClr val="8EDBD4"/>
+              <a:srgbClr val="B4C7D2"/>
             </a:solidFill>
           </a:ln>
           <a:effectLst/>
@@ -3209,43 +3209,61 @@
           <p:nvPr/>
         </p:nvCxnSpPr>
         <p:spPr>
-          <a:xfrm flipV="1">
-            <a:off x="1289304" y="2458142"/>
-            <a:ext cx="96012" cy="5953"/>
+          <a:xfrm>
+            <a:off x="914400" y="1371600"/>
+            <a:ext cx="0" cy="3474720"/>
           </a:xfrm>
           <a:prstGeom prst="line">
             <a:avLst/>
           </a:prstGeom>
-          <a:ln w="25400">
+          <a:ln w="7620">
             <a:solidFill>
-              <a:srgbClr val="8EDBD4"/>
+              <a:srgbClr val="2E4756"/>
             </a:solidFill>
           </a:ln>
           <a:effectLst/>
         </p:spPr>
       </p:cxnSp>
-      <p:cxnSp>
-        <p:nvCxnSpPr>
-          <p:cNvPr id="7" name="C4-E09 line 5" descr="sci-ppt:o005"/>
-          <p:cNvCxnSpPr/>
-          <p:nvPr/>
-        </p:nvCxnSpPr>
-        <p:spPr>
-          <a:xfrm flipV="1">
-            <a:off x="1385316" y="2449859"/>
-            <a:ext cx="96012" cy="8283"/>
-          </a:xfrm>
-          <a:prstGeom prst="line">
-            <a:avLst/>
-          </a:prstGeom>
-          <a:ln w="25400">
-            <a:solidFill>
-              <a:srgbClr val="8EDBD4"/>
-            </a:solidFill>
-          </a:ln>
-          <a:effectLst/>
-        </p:spPr>
-      </p:cxnSp>
+      <p:sp>
+        <p:nvSpPr>
+          <p:cNvPr id="7" name="C4-E09 text 5" descr="sci-ppt:o005"/>
+          <p:cNvSpPr txBox="1"/>
+          <p:nvPr/>
+        </p:nvSpPr>
+        <p:spPr>
+          <a:xfrm>
+            <a:off x="457200" y="4928616"/>
+            <a:ext cx="914400" cy="208407"/>
+          </a:xfrm>
+          <a:prstGeom prst="rect">
+            <a:avLst/>
+          </a:prstGeom>
+          <a:noFill/>
+          <a:effectLst/>
+        </p:spPr>
+        <p:txBody>
+          <a:bodyPr wrap="none" lIns="18288" rIns="18288" tIns="18288" bIns="18288" anchor="t">
+            <a:spAutoFit/>
+          </a:bodyPr>
+          <a:lstStyle/>
+          <a:p>
+            <a:pPr algn="ctr">
+              <a:spcAft>
+                <a:spcPts val="0"/>
+              </a:spcAft>
+            </a:pPr>
+            <a:r>
+              <a:rPr sz="1050" b="0" i="0">
+                <a:solidFill>
+                  <a:srgbClr val="B4C7D2"/>
+                </a:solidFill>
+                <a:latin typeface="Arial"/>
+              </a:rPr>
+              <a:t>0.000</a:t>
+            </a:r>
+          </a:p>
+        </p:txBody>
+      </p:sp>
       <p:cxnSp>
         <p:nvCxnSpPr>
           <p:cNvPr id="8" name="C4-E09 line 6" descr="sci-ppt:o006"/>
@@ -3253,16 +3271,16 @@
           <p:nvPr/>
         </p:nvCxnSpPr>
         <p:spPr>
-          <a:xfrm flipV="1">
-            <a:off x="1481328" y="2439298"/>
-            <a:ext cx="96012" cy="10561"/>
+          <a:xfrm>
+            <a:off x="2286000" y="4846320"/>
+            <a:ext cx="0" cy="64008"/>
           </a:xfrm>
           <a:prstGeom prst="line">
             <a:avLst/>
           </a:prstGeom>
-          <a:ln w="25400">
+          <a:ln w="12700">
             <a:solidFill>
-              <a:srgbClr val="8EDBD4"/>
+              <a:srgbClr val="B4C7D2"/>
             </a:solidFill>
           </a:ln>
           <a:effectLst/>
@@ -3275,43 +3293,61 @@
           <p:nvPr/>
         </p:nvCxnSpPr>
         <p:spPr>
-          <a:xfrm flipV="1">
-            <a:off x="1577340" y="2426522"/>
-            <a:ext cx="96012" cy="12776"/>
+          <a:xfrm>
+            <a:off x="2286000" y="1371600"/>
+            <a:ext cx="0" cy="3474720"/>
           </a:xfrm>
           <a:prstGeom prst="line">
             <a:avLst/>
           </a:prstGeom>
-          <a:ln w="25400">
+          <a:ln w="7620">
             <a:solidFill>
-              <a:srgbClr val="8EDBD4"/>
+              <a:srgbClr val="2E4756"/>
             </a:solidFill>
           </a:ln>
           <a:effectLst/>
         </p:spPr>
       </p:cxnSp>
-      <p:cxnSp>
-        <p:nvCxnSpPr>
-          <p:cNvPr id="10" name="C4-E09 line 8" descr="sci-ppt:o008"/>
-          <p:cNvCxnSpPr/>
-          <p:nvPr/>
-        </p:nvCxnSpPr>
-        <p:spPr>
-          <a:xfrm flipV="1">
-            <a:off x="1673352" y="2411613"/>
-            <a:ext cx="96012" cy="14909"/>
-          </a:xfrm>
-          <a:prstGeom prst="line">
-            <a:avLst/>
-          </a:prstGeom>
-          <a:ln w="25400">
-            <a:solidFill>
-              <a:srgbClr val="8EDBD4"/>
-            </a:solidFill>
-          </a:ln>
-          <a:effectLst/>
-        </p:spPr>
-      </p:cxnSp>
+      <p:sp>
+        <p:nvSpPr>
+          <p:cNvPr id="10" name="C4-E09 text 8" descr="sci-ppt:o008"/>
+          <p:cNvSpPr txBox="1"/>
+          <p:nvPr/>
+        </p:nvSpPr>
+        <p:spPr>
+          <a:xfrm>
+            <a:off x="1828800" y="4928616"/>
+            <a:ext cx="914400" cy="208407"/>
+          </a:xfrm>
+          <a:prstGeom prst="rect">
+            <a:avLst/>
+          </a:prstGeom>
+          <a:noFill/>
+          <a:effectLst/>
+        </p:spPr>
+        <p:txBody>
+          <a:bodyPr wrap="none" lIns="18288" rIns="18288" tIns="18288" bIns="18288" anchor="t">
+            <a:spAutoFit/>
+          </a:bodyPr>
+          <a:lstStyle/>
+          <a:p>
+            <a:pPr algn="ctr">
+              <a:spcAft>
+                <a:spcPts val="0"/>
+              </a:spcAft>
+            </a:pPr>
+            <a:r>
+              <a:rPr sz="1050" b="0" i="0">
+                <a:solidFill>
+                  <a:srgbClr val="B4C7D2"/>
+                </a:solidFill>
+                <a:latin typeface="Arial"/>
+              </a:rPr>
+              <a:t>0.025</a:t>
+            </a:r>
+          </a:p>
+        </p:txBody>
+      </p:sp>
       <p:cxnSp>
         <p:nvCxnSpPr>
           <p:cNvPr id="11" name="C4-E09 line 9" descr="sci-ppt:o009"/>
@@ -3319,16 +3355,16 @@
           <p:nvPr/>
         </p:nvCxnSpPr>
         <p:spPr>
-          <a:xfrm flipV="1">
-            <a:off x="1769364" y="2394660"/>
-            <a:ext cx="96012" cy="16953"/>
+          <a:xfrm>
+            <a:off x="3657600" y="4846320"/>
+            <a:ext cx="0" cy="64008"/>
           </a:xfrm>
           <a:prstGeom prst="line">
             <a:avLst/>
           </a:prstGeom>
-          <a:ln w="25400">
+          <a:ln w="12700">
             <a:solidFill>
-              <a:srgbClr val="8EDBD4"/>
+              <a:srgbClr val="B4C7D2"/>
             </a:solidFill>
           </a:ln>
           <a:effectLst/>
@@ -3341,43 +3377,61 @@
           <p:nvPr/>
         </p:nvCxnSpPr>
         <p:spPr>
-          <a:xfrm flipV="1">
-            <a:off x="1865376" y="2375768"/>
-            <a:ext cx="96012" cy="18892"/>
+          <a:xfrm>
+            <a:off x="3657600" y="1371600"/>
+            <a:ext cx="0" cy="3474720"/>
           </a:xfrm>
           <a:prstGeom prst="line">
             <a:avLst/>
           </a:prstGeom>
-          <a:ln w="25400">
+          <a:ln w="7620">
             <a:solidFill>
-              <a:srgbClr val="8EDBD4"/>
+              <a:srgbClr val="2E4756"/>
             </a:solidFill>
           </a:ln>
           <a:effectLst/>
         </p:spPr>
       </p:cxnSp>
-      <p:cxnSp>
-        <p:nvCxnSpPr>
-          <p:cNvPr id="13" name="C4-E09 line 11" descr="sci-ppt:o011"/>
-          <p:cNvCxnSpPr/>
-          <p:nvPr/>
-        </p:nvCxnSpPr>
-        <p:spPr>
-          <a:xfrm flipV="1">
-            <a:off x="1961388" y="2355055"/>
-            <a:ext cx="96012" cy="20713"/>
-          </a:xfrm>
-          <a:prstGeom prst="line">
-            <a:avLst/>
-          </a:prstGeom>
-          <a:ln w="25400">
-            <a:solidFill>
-              <a:srgbClr val="8EDBD4"/>
-            </a:solidFill>
-          </a:ln>
-          <a:effectLst/>
-        </p:spPr>
-      </p:cxnSp>
+      <p:sp>
+        <p:nvSpPr>
+          <p:cNvPr id="13" name="C4-E09 text 11" descr="sci-ppt:o011"/>
+          <p:cNvSpPr txBox="1"/>
+          <p:nvPr/>
+        </p:nvSpPr>
+        <p:spPr>
+          <a:xfrm>
+            <a:off x="3200400" y="4928616"/>
+            <a:ext cx="914400" cy="208407"/>
+          </a:xfrm>
+          <a:prstGeom prst="rect">
+            <a:avLst/>
+          </a:prstGeom>
+          <a:noFill/>
+          <a:effectLst/>
+        </p:spPr>
+        <p:txBody>
+          <a:bodyPr wrap="none" lIns="18288" rIns="18288" tIns="18288" bIns="18288" anchor="t">
+            <a:spAutoFit/>
+          </a:bodyPr>
+          <a:lstStyle/>
+          <a:p>
+            <a:pPr algn="ctr">
+              <a:spcAft>
+                <a:spcPts val="0"/>
+              </a:spcAft>
+            </a:pPr>
+            <a:r>
+              <a:rPr sz="1050" b="0" i="0">
+                <a:solidFill>
+                  <a:srgbClr val="B4C7D2"/>
+                </a:solidFill>
+                <a:latin typeface="Arial"/>
+              </a:rPr>
+              <a:t>0.050</a:t>
+            </a:r>
+          </a:p>
+        </p:txBody>
+      </p:sp>
       <p:cxnSp>
         <p:nvCxnSpPr>
           <p:cNvPr id="14" name="C4-E09 line 12" descr="sci-ppt:o012"/>
@@ -3385,16 +3439,16 @@
           <p:nvPr/>
         </p:nvCxnSpPr>
         <p:spPr>
-          <a:xfrm flipV="1">
-            <a:off x="2057400" y="2332648"/>
-            <a:ext cx="96012" cy="22407"/>
+          <a:xfrm>
+            <a:off x="5029199" y="4846320"/>
+            <a:ext cx="0" cy="64008"/>
           </a:xfrm>
           <a:prstGeom prst="line">
             <a:avLst/>
           </a:prstGeom>
-          <a:ln w="25400">
+          <a:ln w="12700">
             <a:solidFill>
-              <a:srgbClr val="8EDBD4"/>
+              <a:srgbClr val="B4C7D2"/>
             </a:solidFill>
           </a:ln>
           <a:effectLst/>
@@ -3407,43 +3461,61 @@
           <p:nvPr/>
         </p:nvCxnSpPr>
         <p:spPr>
-          <a:xfrm flipV="1">
-            <a:off x="2153412" y="2308685"/>
-            <a:ext cx="96012" cy="23963"/>
+          <a:xfrm>
+            <a:off x="5029199" y="1371600"/>
+            <a:ext cx="0" cy="3474720"/>
           </a:xfrm>
           <a:prstGeom prst="line">
             <a:avLst/>
           </a:prstGeom>
-          <a:ln w="25400">
+          <a:ln w="7620">
             <a:solidFill>
-              <a:srgbClr val="8EDBD4"/>
+              <a:srgbClr val="2E4756"/>
             </a:solidFill>
           </a:ln>
           <a:effectLst/>
         </p:spPr>
       </p:cxnSp>
-      <p:cxnSp>
-        <p:nvCxnSpPr>
-          <p:cNvPr id="16" name="C4-E09 line 14" descr="sci-ppt:o014"/>
-          <p:cNvCxnSpPr/>
-          <p:nvPr/>
-        </p:nvCxnSpPr>
-        <p:spPr>
-          <a:xfrm flipV="1">
-            <a:off x="2249424" y="2283313"/>
-            <a:ext cx="96012" cy="25372"/>
-          </a:xfrm>
-          <a:prstGeom prst="line">
-            <a:avLst/>
-          </a:prstGeom>
-          <a:ln w="25400">
-            <a:solidFill>
-              <a:srgbClr val="8EDBD4"/>
-            </a:solidFill>
-          </a:ln>
-          <a:effectLst/>
-        </p:spPr>
-      </p:cxnSp>
+      <p:sp>
+        <p:nvSpPr>
+          <p:cNvPr id="16" name="C4-E09 text 14" descr="sci-ppt:o014"/>
+          <p:cNvSpPr txBox="1"/>
+          <p:nvPr/>
+        </p:nvSpPr>
+        <p:spPr>
+          <a:xfrm>
+            <a:off x="4571999" y="4928616"/>
+            <a:ext cx="914400" cy="208407"/>
+          </a:xfrm>
+          <a:prstGeom prst="rect">
+            <a:avLst/>
+          </a:prstGeom>
+          <a:noFill/>
+          <a:effectLst/>
+        </p:spPr>
+        <p:txBody>
+          <a:bodyPr wrap="none" lIns="18288" rIns="18288" tIns="18288" bIns="18288" anchor="t">
+            <a:spAutoFit/>
+          </a:bodyPr>
+          <a:lstStyle/>
+          <a:p>
+            <a:pPr algn="ctr">
+              <a:spcAft>
+                <a:spcPts val="0"/>
+              </a:spcAft>
+            </a:pPr>
+            <a:r>
+              <a:rPr sz="1050" b="0" i="0">
+                <a:solidFill>
+                  <a:srgbClr val="B4C7D2"/>
+                </a:solidFill>
+                <a:latin typeface="Arial"/>
+              </a:rPr>
+              <a:t>0.075</a:t>
+            </a:r>
+          </a:p>
+        </p:txBody>
+      </p:sp>
       <p:cxnSp>
         <p:nvCxnSpPr>
           <p:cNvPr id="17" name="C4-E09 line 15" descr="sci-ppt:o015"/>
@@ -3451,16 +3523,16 @@
           <p:nvPr/>
         </p:nvCxnSpPr>
         <p:spPr>
-          <a:xfrm flipV="1">
-            <a:off x="2345436" y="2256689"/>
-            <a:ext cx="96012" cy="26624"/>
+          <a:xfrm>
+            <a:off x="6400800" y="4846320"/>
+            <a:ext cx="0" cy="64008"/>
           </a:xfrm>
           <a:prstGeom prst="line">
             <a:avLst/>
           </a:prstGeom>
-          <a:ln w="25400">
+          <a:ln w="12700">
             <a:solidFill>
-              <a:srgbClr val="8EDBD4"/>
+              <a:srgbClr val="B4C7D2"/>
             </a:solidFill>
           </a:ln>
           <a:effectLst/>
@@ -3473,43 +3545,61 @@
           <p:nvPr/>
         </p:nvCxnSpPr>
         <p:spPr>
-          <a:xfrm flipV="1">
-            <a:off x="2441448" y="2228978"/>
-            <a:ext cx="96012" cy="27711"/>
+          <a:xfrm>
+            <a:off x="6400800" y="1371600"/>
+            <a:ext cx="0" cy="3474720"/>
           </a:xfrm>
           <a:prstGeom prst="line">
             <a:avLst/>
           </a:prstGeom>
-          <a:ln w="25400">
+          <a:ln w="7620">
             <a:solidFill>
-              <a:srgbClr val="8EDBD4"/>
+              <a:srgbClr val="2E4756"/>
             </a:solidFill>
           </a:ln>
           <a:effectLst/>
         </p:spPr>
       </p:cxnSp>
-      <p:cxnSp>
-        <p:nvCxnSpPr>
-          <p:cNvPr id="19" name="C4-E09 line 17" descr="sci-ppt:o017"/>
-          <p:cNvCxnSpPr/>
-          <p:nvPr/>
-        </p:nvCxnSpPr>
-        <p:spPr>
-          <a:xfrm flipV="1">
-            <a:off x="2537460" y="2200350"/>
-            <a:ext cx="96012" cy="28628"/>
-          </a:xfrm>
-          <a:prstGeom prst="line">
-            <a:avLst/>
-          </a:prstGeom>
-          <a:ln w="25400">
-            <a:solidFill>
-              <a:srgbClr val="8EDBD4"/>
-            </a:solidFill>
-          </a:ln>
-          <a:effectLst/>
-        </p:spPr>
-      </p:cxnSp>
+      <p:sp>
+        <p:nvSpPr>
+          <p:cNvPr id="19" name="C4-E09 text 17" descr="sci-ppt:o017"/>
+          <p:cNvSpPr txBox="1"/>
+          <p:nvPr/>
+        </p:nvSpPr>
+        <p:spPr>
+          <a:xfrm>
+            <a:off x="5943600" y="4928616"/>
+            <a:ext cx="914400" cy="208407"/>
+          </a:xfrm>
+          <a:prstGeom prst="rect">
+            <a:avLst/>
+          </a:prstGeom>
+          <a:noFill/>
+          <a:effectLst/>
+        </p:spPr>
+        <p:txBody>
+          <a:bodyPr wrap="none" lIns="18288" rIns="18288" tIns="18288" bIns="18288" anchor="t">
+            <a:spAutoFit/>
+          </a:bodyPr>
+          <a:lstStyle/>
+          <a:p>
+            <a:pPr algn="ctr">
+              <a:spcAft>
+                <a:spcPts val="0"/>
+              </a:spcAft>
+            </a:pPr>
+            <a:r>
+              <a:rPr sz="1050" b="0" i="0">
+                <a:solidFill>
+                  <a:srgbClr val="B4C7D2"/>
+                </a:solidFill>
+                <a:latin typeface="Arial"/>
+              </a:rPr>
+              <a:t>0.100</a:t>
+            </a:r>
+          </a:p>
+        </p:txBody>
+      </p:sp>
       <p:cxnSp>
         <p:nvCxnSpPr>
           <p:cNvPr id="20" name="C4-E09 line 18" descr="sci-ppt:o018"/>
@@ -3517,16 +3607,16 @@
           <p:nvPr/>
         </p:nvCxnSpPr>
         <p:spPr>
-          <a:xfrm flipV="1">
-            <a:off x="2633472" y="2170981"/>
-            <a:ext cx="96012" cy="29369"/>
+          <a:xfrm>
+            <a:off x="850392" y="4846320"/>
+            <a:ext cx="64008" cy="0"/>
           </a:xfrm>
           <a:prstGeom prst="line">
             <a:avLst/>
           </a:prstGeom>
-          <a:ln w="25400">
+          <a:ln w="12700">
             <a:solidFill>
-              <a:srgbClr val="8EDBD4"/>
+              <a:srgbClr val="B4C7D2"/>
             </a:solidFill>
           </a:ln>
           <a:effectLst/>
@@ -3539,16 +3629,16 @@
           <p:nvPr/>
         </p:nvCxnSpPr>
         <p:spPr>
-          <a:xfrm flipV="1">
-            <a:off x="2729484" y="2141053"/>
-            <a:ext cx="96012" cy="29928"/>
+          <a:xfrm>
+            <a:off x="850392" y="4151376"/>
+            <a:ext cx="64008" cy="0"/>
           </a:xfrm>
           <a:prstGeom prst="line">
             <a:avLst/>
           </a:prstGeom>
-          <a:ln w="25400">
+          <a:ln w="12700">
             <a:solidFill>
-              <a:srgbClr val="8EDBD4"/>
+              <a:srgbClr val="B4C7D2"/>
             </a:solidFill>
           </a:ln>
           <a:effectLst/>
@@ -3561,43 +3651,61 @@
           <p:nvPr/>
         </p:nvCxnSpPr>
         <p:spPr>
-          <a:xfrm flipV="1">
-            <a:off x="2825496" y="2110750"/>
-            <a:ext cx="96012" cy="30303"/>
+          <a:xfrm>
+            <a:off x="914400" y="4151376"/>
+            <a:ext cx="5486400" cy="0"/>
           </a:xfrm>
           <a:prstGeom prst="line">
             <a:avLst/>
           </a:prstGeom>
-          <a:ln w="25400">
+          <a:ln w="7620">
             <a:solidFill>
-              <a:srgbClr val="8EDBD4"/>
+              <a:srgbClr val="2E4756"/>
             </a:solidFill>
           </a:ln>
           <a:effectLst/>
         </p:spPr>
       </p:cxnSp>
-      <p:cxnSp>
-        <p:nvCxnSpPr>
-          <p:cNvPr id="23" name="C4-E09 line 21" descr="sci-ppt:o021"/>
-          <p:cNvCxnSpPr/>
-          <p:nvPr/>
-        </p:nvCxnSpPr>
-        <p:spPr>
-          <a:xfrm flipV="1">
-            <a:off x="2921508" y="2080260"/>
-            <a:ext cx="96012" cy="30490"/>
-          </a:xfrm>
-          <a:prstGeom prst="line">
-            <a:avLst/>
-          </a:prstGeom>
-          <a:ln w="25400">
-            <a:solidFill>
-              <a:srgbClr val="8EDBD4"/>
-            </a:solidFill>
-          </a:ln>
-          <a:effectLst/>
-        </p:spPr>
-      </p:cxnSp>
+      <p:sp>
+        <p:nvSpPr>
+          <p:cNvPr id="23" name="C4-E09 text 21" descr="sci-ppt:o021"/>
+          <p:cNvSpPr txBox="1"/>
+          <p:nvPr/>
+        </p:nvSpPr>
+        <p:spPr>
+          <a:xfrm>
+            <a:off x="45720" y="4069080"/>
+            <a:ext cx="777240" cy="208407"/>
+          </a:xfrm>
+          <a:prstGeom prst="rect">
+            <a:avLst/>
+          </a:prstGeom>
+          <a:noFill/>
+          <a:effectLst/>
+        </p:spPr>
+        <p:txBody>
+          <a:bodyPr wrap="none" lIns="18288" rIns="18288" tIns="18288" bIns="18288" anchor="t">
+            <a:spAutoFit/>
+          </a:bodyPr>
+          <a:lstStyle/>
+          <a:p>
+            <a:pPr algn="r">
+              <a:spcAft>
+                <a:spcPts val="0"/>
+              </a:spcAft>
+            </a:pPr>
+            <a:r>
+              <a:rPr sz="1050" b="0" i="0">
+                <a:solidFill>
+                  <a:srgbClr val="B4C7D2"/>
+                </a:solidFill>
+                <a:latin typeface="Arial"/>
+              </a:rPr>
+              <a:t>1</a:t>
+            </a:r>
+          </a:p>
+        </p:txBody>
+      </p:sp>
       <p:cxnSp>
         <p:nvCxnSpPr>
           <p:cNvPr id="24" name="C4-E09 line 22" descr="sci-ppt:o022"/>
@@ -3605,16 +3713,16 @@
           <p:nvPr/>
         </p:nvCxnSpPr>
         <p:spPr>
-          <a:xfrm flipV="1">
-            <a:off x="3017520" y="2049769"/>
-            <a:ext cx="96012" cy="30491"/>
+          <a:xfrm>
+            <a:off x="850392" y="3456432"/>
+            <a:ext cx="64008" cy="0"/>
           </a:xfrm>
           <a:prstGeom prst="line">
             <a:avLst/>
           </a:prstGeom>
-          <a:ln w="25400">
+          <a:ln w="12700">
             <a:solidFill>
-              <a:srgbClr val="8EDBD4"/>
+              <a:srgbClr val="B4C7D2"/>
             </a:solidFill>
           </a:ln>
           <a:effectLst/>
@@ -3627,43 +3735,61 @@
           <p:nvPr/>
         </p:nvCxnSpPr>
         <p:spPr>
-          <a:xfrm flipV="1">
-            <a:off x="3113532" y="2019466"/>
-            <a:ext cx="96012" cy="30303"/>
+          <a:xfrm>
+            <a:off x="914400" y="3456432"/>
+            <a:ext cx="5486400" cy="0"/>
           </a:xfrm>
           <a:prstGeom prst="line">
             <a:avLst/>
           </a:prstGeom>
-          <a:ln w="25400">
+          <a:ln w="7620">
             <a:solidFill>
-              <a:srgbClr val="8EDBD4"/>
+              <a:srgbClr val="2E4756"/>
             </a:solidFill>
           </a:ln>
           <a:effectLst/>
         </p:spPr>
       </p:cxnSp>
-      <p:cxnSp>
-        <p:nvCxnSpPr>
-          <p:cNvPr id="26" name="C4-E09 line 24" descr="sci-ppt:o024"/>
-          <p:cNvCxnSpPr/>
-          <p:nvPr/>
-        </p:nvCxnSpPr>
-        <p:spPr>
-          <a:xfrm flipV="1">
-            <a:off x="3209544" y="1989538"/>
-            <a:ext cx="96012" cy="29928"/>
-          </a:xfrm>
-          <a:prstGeom prst="line">
-            <a:avLst/>
-          </a:prstGeom>
-          <a:ln w="25400">
-            <a:solidFill>
-              <a:srgbClr val="8EDBD4"/>
-            </a:solidFill>
-          </a:ln>
-          <a:effectLst/>
-        </p:spPr>
-      </p:cxnSp>
+      <p:sp>
+        <p:nvSpPr>
+          <p:cNvPr id="26" name="C4-E09 text 24" descr="sci-ppt:o024"/>
+          <p:cNvSpPr txBox="1"/>
+          <p:nvPr/>
+        </p:nvSpPr>
+        <p:spPr>
+          <a:xfrm>
+            <a:off x="45720" y="3374136"/>
+            <a:ext cx="777240" cy="208407"/>
+          </a:xfrm>
+          <a:prstGeom prst="rect">
+            <a:avLst/>
+          </a:prstGeom>
+          <a:noFill/>
+          <a:effectLst/>
+        </p:spPr>
+        <p:txBody>
+          <a:bodyPr wrap="none" lIns="18288" rIns="18288" tIns="18288" bIns="18288" anchor="t">
+            <a:spAutoFit/>
+          </a:bodyPr>
+          <a:lstStyle/>
+          <a:p>
+            <a:pPr algn="r">
+              <a:spcAft>
+                <a:spcPts val="0"/>
+              </a:spcAft>
+            </a:pPr>
+            <a:r>
+              <a:rPr sz="1050" b="0" i="0">
+                <a:solidFill>
+                  <a:srgbClr val="B4C7D2"/>
+                </a:solidFill>
+                <a:latin typeface="Arial"/>
+              </a:rPr>
+              <a:t>2</a:t>
+            </a:r>
+          </a:p>
+        </p:txBody>
+      </p:sp>
       <p:cxnSp>
         <p:nvCxnSpPr>
           <p:cNvPr id="27" name="C4-E09 line 25" descr="sci-ppt:o025"/>
@@ -3671,16 +3797,16 @@
           <p:nvPr/>
         </p:nvCxnSpPr>
         <p:spPr>
-          <a:xfrm flipV="1">
-            <a:off x="3305556" y="1960169"/>
-            <a:ext cx="96012" cy="29369"/>
+          <a:xfrm>
+            <a:off x="850392" y="2761488"/>
+            <a:ext cx="64008" cy="0"/>
           </a:xfrm>
           <a:prstGeom prst="line">
             <a:avLst/>
           </a:prstGeom>
-          <a:ln w="25400">
+          <a:ln w="12700">
             <a:solidFill>
-              <a:srgbClr val="8EDBD4"/>
+              <a:srgbClr val="B4C7D2"/>
             </a:solidFill>
           </a:ln>
           <a:effectLst/>
@@ -3693,43 +3819,61 @@
           <p:nvPr/>
         </p:nvCxnSpPr>
         <p:spPr>
-          <a:xfrm flipV="1">
-            <a:off x="3401568" y="1931541"/>
-            <a:ext cx="96012" cy="28628"/>
+          <a:xfrm>
+            <a:off x="914400" y="2761488"/>
+            <a:ext cx="5486400" cy="0"/>
           </a:xfrm>
           <a:prstGeom prst="line">
             <a:avLst/>
           </a:prstGeom>
-          <a:ln w="25400">
+          <a:ln w="7620">
             <a:solidFill>
-              <a:srgbClr val="8EDBD4"/>
+              <a:srgbClr val="2E4756"/>
             </a:solidFill>
           </a:ln>
           <a:effectLst/>
         </p:spPr>
       </p:cxnSp>
-      <p:cxnSp>
-        <p:nvCxnSpPr>
-          <p:cNvPr id="29" name="C4-E09 line 27" descr="sci-ppt:o027"/>
-          <p:cNvCxnSpPr/>
-          <p:nvPr/>
-        </p:nvCxnSpPr>
-        <p:spPr>
-          <a:xfrm flipV="1">
-            <a:off x="3497580" y="1903830"/>
-            <a:ext cx="96011" cy="27711"/>
-          </a:xfrm>
-          <a:prstGeom prst="line">
-            <a:avLst/>
-          </a:prstGeom>
-          <a:ln w="25400">
-            <a:solidFill>
-              <a:srgbClr val="8EDBD4"/>
-            </a:solidFill>
-          </a:ln>
-          <a:effectLst/>
-        </p:spPr>
-      </p:cxnSp>
+      <p:sp>
+        <p:nvSpPr>
+          <p:cNvPr id="29" name="C4-E09 text 27" descr="sci-ppt:o027"/>
+          <p:cNvSpPr txBox="1"/>
+          <p:nvPr/>
+        </p:nvSpPr>
+        <p:spPr>
+          <a:xfrm>
+            <a:off x="45720" y="2679192"/>
+            <a:ext cx="777240" cy="208407"/>
+          </a:xfrm>
+          <a:prstGeom prst="rect">
+            <a:avLst/>
+          </a:prstGeom>
+          <a:noFill/>
+          <a:effectLst/>
+        </p:spPr>
+        <p:txBody>
+          <a:bodyPr wrap="none" lIns="18288" rIns="18288" tIns="18288" bIns="18288" anchor="t">
+            <a:spAutoFit/>
+          </a:bodyPr>
+          <a:lstStyle/>
+          <a:p>
+            <a:pPr algn="r">
+              <a:spcAft>
+                <a:spcPts val="0"/>
+              </a:spcAft>
+            </a:pPr>
+            <a:r>
+              <a:rPr sz="1050" b="0" i="0">
+                <a:solidFill>
+                  <a:srgbClr val="B4C7D2"/>
+                </a:solidFill>
+                <a:latin typeface="Arial"/>
+              </a:rPr>
+              <a:t>3</a:t>
+            </a:r>
+          </a:p>
+        </p:txBody>
+      </p:sp>
       <p:cxnSp>
         <p:nvCxnSpPr>
           <p:cNvPr id="30" name="C4-E09 line 28" descr="sci-ppt:o028"/>
@@ -3737,16 +3881,16 @@
           <p:nvPr/>
         </p:nvCxnSpPr>
         <p:spPr>
-          <a:xfrm flipV="1">
-            <a:off x="3593591" y="1877206"/>
-            <a:ext cx="96013" cy="26624"/>
+          <a:xfrm>
+            <a:off x="850392" y="2066543"/>
+            <a:ext cx="64008" cy="0"/>
           </a:xfrm>
           <a:prstGeom prst="line">
             <a:avLst/>
           </a:prstGeom>
-          <a:ln w="25400">
+          <a:ln w="12700">
             <a:solidFill>
-              <a:srgbClr val="8EDBD4"/>
+              <a:srgbClr val="B4C7D2"/>
             </a:solidFill>
           </a:ln>
           <a:effectLst/>
@@ -3759,43 +3903,61 @@
           <p:nvPr/>
         </p:nvCxnSpPr>
         <p:spPr>
-          <a:xfrm flipV="1">
-            <a:off x="3689604" y="1851834"/>
-            <a:ext cx="96011" cy="25372"/>
+          <a:xfrm>
+            <a:off x="914400" y="2066543"/>
+            <a:ext cx="5486400" cy="0"/>
           </a:xfrm>
           <a:prstGeom prst="line">
             <a:avLst/>
           </a:prstGeom>
-          <a:ln w="25400">
+          <a:ln w="7620">
             <a:solidFill>
-              <a:srgbClr val="8EDBD4"/>
+              <a:srgbClr val="2E4756"/>
             </a:solidFill>
           </a:ln>
           <a:effectLst/>
         </p:spPr>
       </p:cxnSp>
-      <p:cxnSp>
-        <p:nvCxnSpPr>
-          <p:cNvPr id="32" name="C4-E09 line 30" descr="sci-ppt:o030"/>
-          <p:cNvCxnSpPr/>
-          <p:nvPr/>
-        </p:nvCxnSpPr>
-        <p:spPr>
-          <a:xfrm flipV="1">
-            <a:off x="3785615" y="1827871"/>
-            <a:ext cx="96013" cy="23963"/>
-          </a:xfrm>
-          <a:prstGeom prst="line">
-            <a:avLst/>
-          </a:prstGeom>
-          <a:ln w="25400">
-            <a:solidFill>
-              <a:srgbClr val="8EDBD4"/>
-            </a:solidFill>
-          </a:ln>
-          <a:effectLst/>
-        </p:spPr>
-      </p:cxnSp>
+      <p:sp>
+        <p:nvSpPr>
+          <p:cNvPr id="32" name="C4-E09 text 30" descr="sci-ppt:o030"/>
+          <p:cNvSpPr txBox="1"/>
+          <p:nvPr/>
+        </p:nvSpPr>
+        <p:spPr>
+          <a:xfrm>
+            <a:off x="45720" y="1984248"/>
+            <a:ext cx="777240" cy="208407"/>
+          </a:xfrm>
+          <a:prstGeom prst="rect">
+            <a:avLst/>
+          </a:prstGeom>
+          <a:noFill/>
+          <a:effectLst/>
+        </p:spPr>
+        <p:txBody>
+          <a:bodyPr wrap="none" lIns="18288" rIns="18288" tIns="18288" bIns="18288" anchor="t">
+            <a:spAutoFit/>
+          </a:bodyPr>
+          <a:lstStyle/>
+          <a:p>
+            <a:pPr algn="r">
+              <a:spcAft>
+                <a:spcPts val="0"/>
+              </a:spcAft>
+            </a:pPr>
+            <a:r>
+              <a:rPr sz="1050" b="0" i="0">
+                <a:solidFill>
+                  <a:srgbClr val="B4C7D2"/>
+                </a:solidFill>
+                <a:latin typeface="Arial"/>
+              </a:rPr>
+              <a:t>4</a:t>
+            </a:r>
+          </a:p>
+        </p:txBody>
+      </p:sp>
       <p:cxnSp>
         <p:nvCxnSpPr>
           <p:cNvPr id="33" name="C4-E09 line 31" descr="sci-ppt:o031"/>
@@ -3803,16 +3965,16 @@
           <p:nvPr/>
         </p:nvCxnSpPr>
         <p:spPr>
-          <a:xfrm flipV="1">
-            <a:off x="3881628" y="1805464"/>
-            <a:ext cx="96011" cy="22407"/>
+          <a:xfrm>
+            <a:off x="850392" y="1371600"/>
+            <a:ext cx="64008" cy="0"/>
           </a:xfrm>
           <a:prstGeom prst="line">
             <a:avLst/>
           </a:prstGeom>
-          <a:ln w="25400">
+          <a:ln w="12700">
             <a:solidFill>
-              <a:srgbClr val="8EDBD4"/>
+              <a:srgbClr val="B4C7D2"/>
             </a:solidFill>
           </a:ln>
           <a:effectLst/>
@@ -3825,131 +3987,519 @@
           <p:nvPr/>
         </p:nvCxnSpPr>
         <p:spPr>
-          <a:xfrm flipV="1">
-            <a:off x="3977639" y="1784751"/>
-            <a:ext cx="96013" cy="20713"/>
+          <a:xfrm>
+            <a:off x="914400" y="1371600"/>
+            <a:ext cx="5486400" cy="0"/>
           </a:xfrm>
           <a:prstGeom prst="line">
             <a:avLst/>
           </a:prstGeom>
-          <a:ln w="25400">
+          <a:ln w="7620">
+            <a:solidFill>
+              <a:srgbClr val="2E4756"/>
+            </a:solidFill>
+          </a:ln>
+          <a:effectLst/>
+        </p:spPr>
+      </p:cxnSp>
+      <p:sp>
+        <p:nvSpPr>
+          <p:cNvPr id="35" name="C4-E09 text 33" descr="sci-ppt:o033"/>
+          <p:cNvSpPr txBox="1"/>
+          <p:nvPr/>
+        </p:nvSpPr>
+        <p:spPr>
+          <a:xfrm>
+            <a:off x="45720" y="1289304"/>
+            <a:ext cx="777240" cy="208407"/>
+          </a:xfrm>
+          <a:prstGeom prst="rect">
+            <a:avLst/>
+          </a:prstGeom>
+          <a:noFill/>
+          <a:effectLst/>
+        </p:spPr>
+        <p:txBody>
+          <a:bodyPr wrap="none" lIns="18288" rIns="18288" tIns="18288" bIns="18288" anchor="t">
+            <a:spAutoFit/>
+          </a:bodyPr>
+          <a:lstStyle/>
+          <a:p>
+            <a:pPr algn="r">
+              <a:spcAft>
+                <a:spcPts val="0"/>
+              </a:spcAft>
+            </a:pPr>
+            <a:r>
+              <a:rPr sz="1050" b="0" i="0">
+                <a:solidFill>
+                  <a:srgbClr val="B4C7D2"/>
+                </a:solidFill>
+                <a:latin typeface="Arial"/>
+              </a:rPr>
+              <a:t>5</a:t>
+            </a:r>
+          </a:p>
+        </p:txBody>
+      </p:sp>
+      <p:sp>
+        <p:nvSpPr>
+          <p:cNvPr id="36" name="C4-E09 text 34" descr="sci-ppt:o034"/>
+          <p:cNvSpPr txBox="1"/>
+          <p:nvPr/>
+        </p:nvSpPr>
+        <p:spPr>
+          <a:xfrm>
+            <a:off x="914400" y="5129783"/>
+            <a:ext cx="5486400" cy="231648"/>
+          </a:xfrm>
+          <a:prstGeom prst="rect">
+            <a:avLst/>
+          </a:prstGeom>
+          <a:noFill/>
+          <a:effectLst/>
+        </p:spPr>
+        <p:txBody>
+          <a:bodyPr wrap="none" lIns="18288" rIns="18288" tIns="18288" bIns="18288" anchor="t">
+            <a:spAutoFit/>
+          </a:bodyPr>
+          <a:lstStyle/>
+          <a:p>
+            <a:pPr algn="ctr">
+              <a:spcAft>
+                <a:spcPts val="0"/>
+              </a:spcAft>
+            </a:pPr>
+            <a:r>
+              <a:rPr sz="1200" b="0" i="0">
+                <a:solidFill>
+                  <a:srgbClr val="E7F0F3"/>
+                </a:solidFill>
+                <a:latin typeface="Arial"/>
+              </a:rPr>
+              <a:t>areal impulse J_A  (N s / m²)</a:t>
+            </a:r>
+          </a:p>
+        </p:txBody>
+      </p:sp>
+      <p:sp>
+        <p:nvSpPr>
+          <p:cNvPr id="37" name="C4-E09 text 35" descr="sci-ppt:o035"/>
+          <p:cNvSpPr txBox="1"/>
+          <p:nvPr/>
+        </p:nvSpPr>
+        <p:spPr>
+          <a:xfrm>
+            <a:off x="365760" y="1024128"/>
+            <a:ext cx="5486400" cy="231648"/>
+          </a:xfrm>
+          <a:prstGeom prst="rect">
+            <a:avLst/>
+          </a:prstGeom>
+          <a:noFill/>
+          <a:effectLst/>
+        </p:spPr>
+        <p:txBody>
+          <a:bodyPr wrap="none" lIns="18288" rIns="18288" tIns="18288" bIns="18288" anchor="t">
+            <a:spAutoFit/>
+          </a:bodyPr>
+          <a:lstStyle/>
+          <a:p>
+            <a:pPr algn="l">
+              <a:spcAft>
+                <a:spcPts val="0"/>
+              </a:spcAft>
+            </a:pPr>
+            <a:r>
+              <a:rPr sz="1200" b="0" i="0">
+                <a:solidFill>
+                  <a:srgbClr val="E7F0F3"/>
+                </a:solidFill>
+                <a:latin typeface="Arial"/>
+              </a:rPr>
+              <a:t>film speed Δẇ  (m/s)</a:t>
+            </a:r>
+          </a:p>
+        </p:txBody>
+      </p:sp>
+      <p:sp>
+        <p:nvSpPr>
+          <p:cNvPr id="38" name="C4-E09 polygon 36" descr="sci-ppt:o036"/>
+          <p:cNvSpPr/>
+          <p:nvPr/>
+        </p:nvSpPr>
+        <p:spPr>
+          <a:xfrm>
+            <a:off x="914400" y="1863727"/>
+            <a:ext cx="5486400" cy="2982593"/>
+          </a:xfrm>
+          <a:custGeom>
+            <a:avLst/>
+            <a:gdLst/>
+            <a:ahLst/>
+            <a:cxnLst/>
+            <a:rect l="l" t="t" r="r" b="b"/>
+            <a:pathLst>
+              <a:path w="5486400" h="2982593">
+                <a:moveTo>
+                  <a:pt x="0" y="2982593"/>
+                </a:moveTo>
+                <a:lnTo>
+                  <a:pt x="55418" y="2952465"/>
+                </a:lnTo>
+                <a:lnTo>
+                  <a:pt x="110836" y="2922338"/>
+                </a:lnTo>
+                <a:lnTo>
+                  <a:pt x="166254" y="2892211"/>
+                </a:lnTo>
+                <a:lnTo>
+                  <a:pt x="221672" y="2862084"/>
+                </a:lnTo>
+                <a:lnTo>
+                  <a:pt x="277090" y="2831957"/>
+                </a:lnTo>
+                <a:lnTo>
+                  <a:pt x="332509" y="2801829"/>
+                </a:lnTo>
+                <a:lnTo>
+                  <a:pt x="387927" y="2771702"/>
+                </a:lnTo>
+                <a:lnTo>
+                  <a:pt x="443345" y="2741575"/>
+                </a:lnTo>
+                <a:lnTo>
+                  <a:pt x="498763" y="2711448"/>
+                </a:lnTo>
+                <a:lnTo>
+                  <a:pt x="554181" y="2681321"/>
+                </a:lnTo>
+                <a:lnTo>
+                  <a:pt x="609599" y="2651193"/>
+                </a:lnTo>
+                <a:lnTo>
+                  <a:pt x="665018" y="2621066"/>
+                </a:lnTo>
+                <a:lnTo>
+                  <a:pt x="720436" y="2590939"/>
+                </a:lnTo>
+                <a:lnTo>
+                  <a:pt x="775854" y="2560812"/>
+                </a:lnTo>
+                <a:lnTo>
+                  <a:pt x="831272" y="2530685"/>
+                </a:lnTo>
+                <a:lnTo>
+                  <a:pt x="886690" y="2500557"/>
+                </a:lnTo>
+                <a:lnTo>
+                  <a:pt x="942109" y="2470430"/>
+                </a:lnTo>
+                <a:lnTo>
+                  <a:pt x="997527" y="2440303"/>
+                </a:lnTo>
+                <a:lnTo>
+                  <a:pt x="1052945" y="2410176"/>
+                </a:lnTo>
+                <a:lnTo>
+                  <a:pt x="1108363" y="2380049"/>
+                </a:lnTo>
+                <a:lnTo>
+                  <a:pt x="1163781" y="2349921"/>
+                </a:lnTo>
+                <a:lnTo>
+                  <a:pt x="1219199" y="2319794"/>
+                </a:lnTo>
+                <a:lnTo>
+                  <a:pt x="1274618" y="2289667"/>
+                </a:lnTo>
+                <a:lnTo>
+                  <a:pt x="1330036" y="2259540"/>
+                </a:lnTo>
+                <a:lnTo>
+                  <a:pt x="1385454" y="2229413"/>
+                </a:lnTo>
+                <a:lnTo>
+                  <a:pt x="1440872" y="2199285"/>
+                </a:lnTo>
+                <a:lnTo>
+                  <a:pt x="1496290" y="2169158"/>
+                </a:lnTo>
+                <a:lnTo>
+                  <a:pt x="1551709" y="2139031"/>
+                </a:lnTo>
+                <a:lnTo>
+                  <a:pt x="1607127" y="2108904"/>
+                </a:lnTo>
+                <a:lnTo>
+                  <a:pt x="1662545" y="2078777"/>
+                </a:lnTo>
+                <a:lnTo>
+                  <a:pt x="1717963" y="2048649"/>
+                </a:lnTo>
+                <a:lnTo>
+                  <a:pt x="1773381" y="2018522"/>
+                </a:lnTo>
+                <a:lnTo>
+                  <a:pt x="1828800" y="1988395"/>
+                </a:lnTo>
+                <a:lnTo>
+                  <a:pt x="1884218" y="1958268"/>
+                </a:lnTo>
+                <a:lnTo>
+                  <a:pt x="1939636" y="1928141"/>
+                </a:lnTo>
+                <a:lnTo>
+                  <a:pt x="1995054" y="1898013"/>
+                </a:lnTo>
+                <a:lnTo>
+                  <a:pt x="2050472" y="1867886"/>
+                </a:lnTo>
+                <a:lnTo>
+                  <a:pt x="2105890" y="1837759"/>
+                </a:lnTo>
+                <a:lnTo>
+                  <a:pt x="2161309" y="1807632"/>
+                </a:lnTo>
+                <a:lnTo>
+                  <a:pt x="2216727" y="1777505"/>
+                </a:lnTo>
+                <a:lnTo>
+                  <a:pt x="2272145" y="1747378"/>
+                </a:lnTo>
+                <a:lnTo>
+                  <a:pt x="2327563" y="1717250"/>
+                </a:lnTo>
+                <a:lnTo>
+                  <a:pt x="2382981" y="1687123"/>
+                </a:lnTo>
+                <a:lnTo>
+                  <a:pt x="2438400" y="1656996"/>
+                </a:lnTo>
+                <a:lnTo>
+                  <a:pt x="2493818" y="1626869"/>
+                </a:lnTo>
+                <a:lnTo>
+                  <a:pt x="2549236" y="1596742"/>
+                </a:lnTo>
+                <a:lnTo>
+                  <a:pt x="2604654" y="1566614"/>
+                </a:lnTo>
+                <a:lnTo>
+                  <a:pt x="2660072" y="1536487"/>
+                </a:lnTo>
+                <a:lnTo>
+                  <a:pt x="2715490" y="1506360"/>
+                </a:lnTo>
+                <a:lnTo>
+                  <a:pt x="2770909" y="1476233"/>
+                </a:lnTo>
+                <a:lnTo>
+                  <a:pt x="2826327" y="1446106"/>
+                </a:lnTo>
+                <a:lnTo>
+                  <a:pt x="2881745" y="1415978"/>
+                </a:lnTo>
+                <a:lnTo>
+                  <a:pt x="2937163" y="1385851"/>
+                </a:lnTo>
+                <a:lnTo>
+                  <a:pt x="2992581" y="1355724"/>
+                </a:lnTo>
+                <a:lnTo>
+                  <a:pt x="3047999" y="1325597"/>
+                </a:lnTo>
+                <a:lnTo>
+                  <a:pt x="3103418" y="1295470"/>
+                </a:lnTo>
+                <a:lnTo>
+                  <a:pt x="3158836" y="1265342"/>
+                </a:lnTo>
+                <a:lnTo>
+                  <a:pt x="3214254" y="1235215"/>
+                </a:lnTo>
+                <a:lnTo>
+                  <a:pt x="3269672" y="1205088"/>
+                </a:lnTo>
+                <a:lnTo>
+                  <a:pt x="3325090" y="1174961"/>
+                </a:lnTo>
+                <a:lnTo>
+                  <a:pt x="3380509" y="1144834"/>
+                </a:lnTo>
+                <a:lnTo>
+                  <a:pt x="3435927" y="1114706"/>
+                </a:lnTo>
+                <a:lnTo>
+                  <a:pt x="3491345" y="1084579"/>
+                </a:lnTo>
+                <a:lnTo>
+                  <a:pt x="3546763" y="1054452"/>
+                </a:lnTo>
+                <a:lnTo>
+                  <a:pt x="3602181" y="1024325"/>
+                </a:lnTo>
+                <a:lnTo>
+                  <a:pt x="3657600" y="994198"/>
+                </a:lnTo>
+                <a:lnTo>
+                  <a:pt x="3713018" y="964070"/>
+                </a:lnTo>
+                <a:lnTo>
+                  <a:pt x="3768436" y="933943"/>
+                </a:lnTo>
+                <a:lnTo>
+                  <a:pt x="3823854" y="903816"/>
+                </a:lnTo>
+                <a:lnTo>
+                  <a:pt x="3879272" y="873689"/>
+                </a:lnTo>
+                <a:lnTo>
+                  <a:pt x="3934690" y="843562"/>
+                </a:lnTo>
+                <a:lnTo>
+                  <a:pt x="3990109" y="813434"/>
+                </a:lnTo>
+                <a:lnTo>
+                  <a:pt x="4045527" y="783307"/>
+                </a:lnTo>
+                <a:lnTo>
+                  <a:pt x="4100945" y="753180"/>
+                </a:lnTo>
+                <a:lnTo>
+                  <a:pt x="4156363" y="723053"/>
+                </a:lnTo>
+                <a:lnTo>
+                  <a:pt x="4211781" y="692926"/>
+                </a:lnTo>
+                <a:lnTo>
+                  <a:pt x="4267200" y="662799"/>
+                </a:lnTo>
+                <a:lnTo>
+                  <a:pt x="4322618" y="632671"/>
+                </a:lnTo>
+                <a:lnTo>
+                  <a:pt x="4378036" y="602544"/>
+                </a:lnTo>
+                <a:lnTo>
+                  <a:pt x="4433454" y="572417"/>
+                </a:lnTo>
+                <a:lnTo>
+                  <a:pt x="4488872" y="542290"/>
+                </a:lnTo>
+                <a:lnTo>
+                  <a:pt x="4544290" y="512163"/>
+                </a:lnTo>
+                <a:lnTo>
+                  <a:pt x="4599709" y="482035"/>
+                </a:lnTo>
+                <a:lnTo>
+                  <a:pt x="4655127" y="451908"/>
+                </a:lnTo>
+                <a:lnTo>
+                  <a:pt x="4710545" y="421781"/>
+                </a:lnTo>
+                <a:lnTo>
+                  <a:pt x="4765963" y="391654"/>
+                </a:lnTo>
+                <a:lnTo>
+                  <a:pt x="4821381" y="361527"/>
+                </a:lnTo>
+                <a:lnTo>
+                  <a:pt x="4876800" y="331399"/>
+                </a:lnTo>
+                <a:lnTo>
+                  <a:pt x="4932218" y="301272"/>
+                </a:lnTo>
+                <a:lnTo>
+                  <a:pt x="4987636" y="271145"/>
+                </a:lnTo>
+                <a:lnTo>
+                  <a:pt x="5043054" y="241018"/>
+                </a:lnTo>
+                <a:lnTo>
+                  <a:pt x="5098472" y="210891"/>
+                </a:lnTo>
+                <a:lnTo>
+                  <a:pt x="5153890" y="180763"/>
+                </a:lnTo>
+                <a:lnTo>
+                  <a:pt x="5209309" y="150636"/>
+                </a:lnTo>
+                <a:lnTo>
+                  <a:pt x="5264727" y="120509"/>
+                </a:lnTo>
+                <a:lnTo>
+                  <a:pt x="5320145" y="90382"/>
+                </a:lnTo>
+                <a:lnTo>
+                  <a:pt x="5375563" y="60255"/>
+                </a:lnTo>
+                <a:lnTo>
+                  <a:pt x="5430981" y="30127"/>
+                </a:lnTo>
+                <a:lnTo>
+                  <a:pt x="5486400" y="0"/>
+                </a:lnTo>
+              </a:path>
+            </a:pathLst>
+          </a:custGeom>
+          <a:noFill/>
+          <a:ln w="38100">
             <a:solidFill>
               <a:srgbClr val="8EDBD4"/>
             </a:solidFill>
           </a:ln>
           <a:effectLst/>
         </p:spPr>
-      </p:cxnSp>
-      <p:cxnSp>
-        <p:nvCxnSpPr>
-          <p:cNvPr id="35" name="C4-E09 line 33" descr="sci-ppt:o033"/>
-          <p:cNvCxnSpPr/>
-          <p:nvPr/>
-        </p:nvCxnSpPr>
-        <p:spPr>
-          <a:xfrm flipV="1">
-            <a:off x="4073652" y="1765859"/>
-            <a:ext cx="96011" cy="18892"/>
-          </a:xfrm>
-          <a:prstGeom prst="line">
-            <a:avLst/>
-          </a:prstGeom>
-          <a:ln w="25400">
-            <a:solidFill>
-              <a:srgbClr val="8EDBD4"/>
-            </a:solidFill>
-          </a:ln>
-          <a:effectLst/>
-        </p:spPr>
-      </p:cxnSp>
-      <p:cxnSp>
-        <p:nvCxnSpPr>
-          <p:cNvPr id="36" name="C4-E09 line 34" descr="sci-ppt:o034"/>
-          <p:cNvCxnSpPr/>
-          <p:nvPr/>
-        </p:nvCxnSpPr>
-        <p:spPr>
-          <a:xfrm flipV="1">
-            <a:off x="4169663" y="1748906"/>
-            <a:ext cx="96013" cy="16953"/>
-          </a:xfrm>
-          <a:prstGeom prst="line">
-            <a:avLst/>
-          </a:prstGeom>
-          <a:ln w="25400">
-            <a:solidFill>
-              <a:srgbClr val="8EDBD4"/>
-            </a:solidFill>
-          </a:ln>
-          <a:effectLst/>
-        </p:spPr>
-      </p:cxnSp>
-      <p:cxnSp>
-        <p:nvCxnSpPr>
-          <p:cNvPr id="37" name="C4-E09 line 35" descr="sci-ppt:o035"/>
-          <p:cNvCxnSpPr/>
-          <p:nvPr/>
-        </p:nvCxnSpPr>
-        <p:spPr>
-          <a:xfrm flipV="1">
-            <a:off x="4265676" y="1733997"/>
-            <a:ext cx="96012" cy="14909"/>
-          </a:xfrm>
-          <a:prstGeom prst="line">
-            <a:avLst/>
-          </a:prstGeom>
-          <a:ln w="25400">
-            <a:solidFill>
-              <a:srgbClr val="8EDBD4"/>
-            </a:solidFill>
-          </a:ln>
-          <a:effectLst/>
-        </p:spPr>
-      </p:cxnSp>
-      <p:cxnSp>
-        <p:nvCxnSpPr>
-          <p:cNvPr id="38" name="C4-E09 line 36" descr="sci-ppt:o036"/>
-          <p:cNvCxnSpPr/>
-          <p:nvPr/>
-        </p:nvCxnSpPr>
-        <p:spPr>
-          <a:xfrm flipV="1">
-            <a:off x="4361688" y="1721221"/>
-            <a:ext cx="96012" cy="12776"/>
-          </a:xfrm>
-          <a:prstGeom prst="line">
-            <a:avLst/>
-          </a:prstGeom>
-          <a:ln w="25400">
-            <a:solidFill>
-              <a:srgbClr val="8EDBD4"/>
-            </a:solidFill>
-          </a:ln>
-          <a:effectLst/>
-        </p:spPr>
-      </p:cxnSp>
-      <p:cxnSp>
-        <p:nvCxnSpPr>
-          <p:cNvPr id="39" name="C4-E09 line 37" descr="sci-ppt:o037"/>
-          <p:cNvCxnSpPr/>
-          <p:nvPr/>
-        </p:nvCxnSpPr>
-        <p:spPr>
-          <a:xfrm flipV="1">
-            <a:off x="4457700" y="1710660"/>
-            <a:ext cx="96012" cy="10561"/>
-          </a:xfrm>
-          <a:prstGeom prst="line">
-            <a:avLst/>
-          </a:prstGeom>
-          <a:ln w="25400">
-            <a:solidFill>
-              <a:srgbClr val="8EDBD4"/>
-            </a:solidFill>
-          </a:ln>
-          <a:effectLst/>
-        </p:spPr>
-      </p:cxnSp>
+        <p:txBody>
+          <a:bodyPr rtlCol="0" anchor="ctr"/>
+          <a:lstStyle/>
+          <a:p>
+            <a:pPr algn="ctr"/>
+          </a:p>
+        </p:txBody>
+      </p:sp>
+      <p:sp>
+        <p:nvSpPr>
+          <p:cNvPr id="39" name="C4-E09 text 37" descr="sci-ppt:o037"/>
+          <p:cNvSpPr txBox="1"/>
+          <p:nvPr/>
+        </p:nvSpPr>
+        <p:spPr>
+          <a:xfrm>
+            <a:off x="1261872" y="1697126"/>
+            <a:ext cx="2194560" cy="239395"/>
+          </a:xfrm>
+          <a:prstGeom prst="rect">
+            <a:avLst/>
+          </a:prstGeom>
+          <a:noFill/>
+          <a:effectLst/>
+        </p:spPr>
+        <p:txBody>
+          <a:bodyPr wrap="none" lIns="18288" rIns="18288" tIns="18288" bIns="18288" anchor="t">
+            <a:spAutoFit/>
+          </a:bodyPr>
+          <a:lstStyle/>
+          <a:p>
+            <a:pPr algn="l">
+              <a:spcAft>
+                <a:spcPts val="0"/>
+              </a:spcAft>
+            </a:pPr>
+            <a:r>
+              <a:rPr sz="1250" b="0" i="0">
+                <a:solidFill>
+                  <a:srgbClr val="8EDBD4"/>
+                </a:solidFill>
+                <a:latin typeface="Arial"/>
+              </a:rPr>
+              <a:t>Δẇ = J_A / m_A</a:t>
+            </a:r>
+          </a:p>
+        </p:txBody>
+      </p:sp>
       <p:cxnSp>
         <p:nvCxnSpPr>
           <p:cNvPr id="40" name="C4-E09 line 38" descr="sci-ppt:o038"/>
@@ -3957,16 +4507,16 @@
           <p:nvPr/>
         </p:nvCxnSpPr>
         <p:spPr>
-          <a:xfrm flipV="1">
-            <a:off x="4553712" y="1702377"/>
-            <a:ext cx="96012" cy="8283"/>
+          <a:xfrm>
+            <a:off x="7132320" y="4846320"/>
+            <a:ext cx="4663439" cy="0"/>
           </a:xfrm>
           <a:prstGeom prst="line">
             <a:avLst/>
           </a:prstGeom>
-          <a:ln w="25400">
+          <a:ln w="19050">
             <a:solidFill>
-              <a:srgbClr val="8EDBD4"/>
+              <a:srgbClr val="B4C7D2"/>
             </a:solidFill>
           </a:ln>
           <a:effectLst/>
@@ -3979,16 +4529,16 @@
           <p:nvPr/>
         </p:nvCxnSpPr>
         <p:spPr>
-          <a:xfrm flipV="1">
-            <a:off x="4649724" y="1696424"/>
-            <a:ext cx="96012" cy="5953"/>
+          <a:xfrm>
+            <a:off x="7132320" y="1371600"/>
+            <a:ext cx="0" cy="3474720"/>
           </a:xfrm>
           <a:prstGeom prst="line">
             <a:avLst/>
           </a:prstGeom>
-          <a:ln w="25400">
+          <a:ln w="19050">
             <a:solidFill>
-              <a:srgbClr val="8EDBD4"/>
+              <a:srgbClr val="B4C7D2"/>
             </a:solidFill>
           </a:ln>
           <a:effectLst/>
@@ -4001,16 +4551,16 @@
           <p:nvPr/>
         </p:nvCxnSpPr>
         <p:spPr>
-          <a:xfrm flipV="1">
-            <a:off x="4745736" y="1692837"/>
-            <a:ext cx="96012" cy="3587"/>
+          <a:xfrm>
+            <a:off x="7132320" y="4846320"/>
+            <a:ext cx="0" cy="64008"/>
           </a:xfrm>
           <a:prstGeom prst="line">
             <a:avLst/>
           </a:prstGeom>
-          <a:ln w="25400">
+          <a:ln w="12700">
             <a:solidFill>
-              <a:srgbClr val="8EDBD4"/>
+              <a:srgbClr val="B4C7D2"/>
             </a:solidFill>
           </a:ln>
           <a:effectLst/>
@@ -4023,43 +4573,61 @@
           <p:nvPr/>
         </p:nvCxnSpPr>
         <p:spPr>
-          <a:xfrm flipV="1">
-            <a:off x="4841748" y="1691640"/>
-            <a:ext cx="96012" cy="1197"/>
+          <a:xfrm>
+            <a:off x="7132320" y="1371600"/>
+            <a:ext cx="0" cy="3474720"/>
           </a:xfrm>
           <a:prstGeom prst="line">
             <a:avLst/>
           </a:prstGeom>
-          <a:ln w="25400">
+          <a:ln w="7620">
             <a:solidFill>
-              <a:srgbClr val="8EDBD4"/>
+              <a:srgbClr val="2E4756"/>
             </a:solidFill>
           </a:ln>
           <a:effectLst/>
         </p:spPr>
       </p:cxnSp>
-      <p:cxnSp>
-        <p:nvCxnSpPr>
-          <p:cNvPr id="44" name="C4-E09 line 42" descr="sci-ppt:o042"/>
-          <p:cNvCxnSpPr/>
-          <p:nvPr/>
-        </p:nvCxnSpPr>
-        <p:spPr>
-          <a:xfrm>
-            <a:off x="4937760" y="1691640"/>
-            <a:ext cx="96012" cy="1197"/>
-          </a:xfrm>
-          <a:prstGeom prst="line">
-            <a:avLst/>
-          </a:prstGeom>
-          <a:ln w="25400">
-            <a:solidFill>
-              <a:srgbClr val="8EDBD4"/>
-            </a:solidFill>
-          </a:ln>
-          <a:effectLst/>
-        </p:spPr>
-      </p:cxnSp>
+      <p:sp>
+        <p:nvSpPr>
+          <p:cNvPr id="44" name="C4-E09 text 42" descr="sci-ppt:o042"/>
+          <p:cNvSpPr txBox="1"/>
+          <p:nvPr/>
+        </p:nvSpPr>
+        <p:spPr>
+          <a:xfrm>
+            <a:off x="6675120" y="4928616"/>
+            <a:ext cx="914400" cy="208407"/>
+          </a:xfrm>
+          <a:prstGeom prst="rect">
+            <a:avLst/>
+          </a:prstGeom>
+          <a:noFill/>
+          <a:effectLst/>
+        </p:spPr>
+        <p:txBody>
+          <a:bodyPr wrap="none" lIns="18288" rIns="18288" tIns="18288" bIns="18288" anchor="t">
+            <a:spAutoFit/>
+          </a:bodyPr>
+          <a:lstStyle/>
+          <a:p>
+            <a:pPr algn="ctr">
+              <a:spcAft>
+                <a:spcPts val="0"/>
+              </a:spcAft>
+            </a:pPr>
+            <a:r>
+              <a:rPr sz="1050" b="0" i="0">
+                <a:solidFill>
+                  <a:srgbClr val="B4C7D2"/>
+                </a:solidFill>
+                <a:latin typeface="Arial"/>
+              </a:rPr>
+              <a:t>0.00</a:t>
+            </a:r>
+          </a:p>
+        </p:txBody>
+      </p:sp>
       <p:cxnSp>
         <p:nvCxnSpPr>
           <p:cNvPr id="45" name="C4-E09 line 43" descr="sci-ppt:o043"/>
@@ -4068,15 +4636,15 @@
         </p:nvCxnSpPr>
         <p:spPr>
           <a:xfrm>
-            <a:off x="5033772" y="1692837"/>
-            <a:ext cx="96012" cy="3587"/>
+            <a:off x="9464040" y="4846320"/>
+            <a:ext cx="0" cy="64008"/>
           </a:xfrm>
           <a:prstGeom prst="line">
             <a:avLst/>
           </a:prstGeom>
-          <a:ln w="25400">
+          <a:ln w="12700">
             <a:solidFill>
-              <a:srgbClr val="8EDBD4"/>
+              <a:srgbClr val="B4C7D2"/>
             </a:solidFill>
           </a:ln>
           <a:effectLst/>
@@ -4090,42 +4658,60 @@
         </p:nvCxnSpPr>
         <p:spPr>
           <a:xfrm>
-            <a:off x="5129784" y="1696424"/>
-            <a:ext cx="96012" cy="5953"/>
+            <a:off x="9464040" y="1371600"/>
+            <a:ext cx="0" cy="3474720"/>
           </a:xfrm>
           <a:prstGeom prst="line">
             <a:avLst/>
           </a:prstGeom>
-          <a:ln w="25400">
+          <a:ln w="7620">
             <a:solidFill>
-              <a:srgbClr val="8EDBD4"/>
+              <a:srgbClr val="2E4756"/>
             </a:solidFill>
           </a:ln>
           <a:effectLst/>
         </p:spPr>
       </p:cxnSp>
-      <p:cxnSp>
-        <p:nvCxnSpPr>
-          <p:cNvPr id="47" name="C4-E09 line 45" descr="sci-ppt:o045"/>
-          <p:cNvCxnSpPr/>
-          <p:nvPr/>
-        </p:nvCxnSpPr>
-        <p:spPr>
-          <a:xfrm>
-            <a:off x="5225796" y="1702377"/>
-            <a:ext cx="96012" cy="8283"/>
-          </a:xfrm>
-          <a:prstGeom prst="line">
-            <a:avLst/>
-          </a:prstGeom>
-          <a:ln w="25400">
-            <a:solidFill>
-              <a:srgbClr val="8EDBD4"/>
-            </a:solidFill>
-          </a:ln>
-          <a:effectLst/>
-        </p:spPr>
-      </p:cxnSp>
+      <p:sp>
+        <p:nvSpPr>
+          <p:cNvPr id="47" name="C4-E09 text 45" descr="sci-ppt:o045"/>
+          <p:cNvSpPr txBox="1"/>
+          <p:nvPr/>
+        </p:nvSpPr>
+        <p:spPr>
+          <a:xfrm>
+            <a:off x="9006840" y="4928616"/>
+            <a:ext cx="914400" cy="208407"/>
+          </a:xfrm>
+          <a:prstGeom prst="rect">
+            <a:avLst/>
+          </a:prstGeom>
+          <a:noFill/>
+          <a:effectLst/>
+        </p:spPr>
+        <p:txBody>
+          <a:bodyPr wrap="none" lIns="18288" rIns="18288" tIns="18288" bIns="18288" anchor="t">
+            <a:spAutoFit/>
+          </a:bodyPr>
+          <a:lstStyle/>
+          <a:p>
+            <a:pPr algn="ctr">
+              <a:spcAft>
+                <a:spcPts val="0"/>
+              </a:spcAft>
+            </a:pPr>
+            <a:r>
+              <a:rPr sz="1050" b="0" i="0">
+                <a:solidFill>
+                  <a:srgbClr val="B4C7D2"/>
+                </a:solidFill>
+                <a:latin typeface="Arial"/>
+              </a:rPr>
+              <a:t>0.05</a:t>
+            </a:r>
+          </a:p>
+        </p:txBody>
+      </p:sp>
       <p:cxnSp>
         <p:nvCxnSpPr>
           <p:cNvPr id="48" name="C4-E09 line 46" descr="sci-ppt:o046"/>
@@ -4134,15 +4720,15 @@
         </p:nvCxnSpPr>
         <p:spPr>
           <a:xfrm>
-            <a:off x="5321808" y="1710660"/>
-            <a:ext cx="96012" cy="10561"/>
+            <a:off x="11795759" y="4846320"/>
+            <a:ext cx="0" cy="64008"/>
           </a:xfrm>
           <a:prstGeom prst="line">
             <a:avLst/>
           </a:prstGeom>
-          <a:ln w="25400">
+          <a:ln w="12700">
             <a:solidFill>
-              <a:srgbClr val="8EDBD4"/>
+              <a:srgbClr val="B4C7D2"/>
             </a:solidFill>
           </a:ln>
           <a:effectLst/>
@@ -4156,42 +4742,60 @@
         </p:nvCxnSpPr>
         <p:spPr>
           <a:xfrm>
-            <a:off x="5417820" y="1721221"/>
-            <a:ext cx="96012" cy="12776"/>
+            <a:off x="11795759" y="1371600"/>
+            <a:ext cx="0" cy="3474720"/>
           </a:xfrm>
           <a:prstGeom prst="line">
             <a:avLst/>
           </a:prstGeom>
-          <a:ln w="25400">
+          <a:ln w="7620">
             <a:solidFill>
-              <a:srgbClr val="8EDBD4"/>
+              <a:srgbClr val="2E4756"/>
             </a:solidFill>
           </a:ln>
           <a:effectLst/>
         </p:spPr>
       </p:cxnSp>
-      <p:cxnSp>
-        <p:nvCxnSpPr>
-          <p:cNvPr id="50" name="C4-E09 line 48" descr="sci-ppt:o048"/>
-          <p:cNvCxnSpPr/>
-          <p:nvPr/>
-        </p:nvCxnSpPr>
-        <p:spPr>
-          <a:xfrm>
-            <a:off x="5513832" y="1733997"/>
-            <a:ext cx="96012" cy="14909"/>
-          </a:xfrm>
-          <a:prstGeom prst="line">
-            <a:avLst/>
-          </a:prstGeom>
-          <a:ln w="25400">
-            <a:solidFill>
-              <a:srgbClr val="8EDBD4"/>
-            </a:solidFill>
-          </a:ln>
-          <a:effectLst/>
-        </p:spPr>
-      </p:cxnSp>
+      <p:sp>
+        <p:nvSpPr>
+          <p:cNvPr id="50" name="C4-E09 text 48" descr="sci-ppt:o048"/>
+          <p:cNvSpPr txBox="1"/>
+          <p:nvPr/>
+        </p:nvSpPr>
+        <p:spPr>
+          <a:xfrm>
+            <a:off x="11338559" y="4928616"/>
+            <a:ext cx="914400" cy="208407"/>
+          </a:xfrm>
+          <a:prstGeom prst="rect">
+            <a:avLst/>
+          </a:prstGeom>
+          <a:noFill/>
+          <a:effectLst/>
+        </p:spPr>
+        <p:txBody>
+          <a:bodyPr wrap="none" lIns="18288" rIns="18288" tIns="18288" bIns="18288" anchor="t">
+            <a:spAutoFit/>
+          </a:bodyPr>
+          <a:lstStyle/>
+          <a:p>
+            <a:pPr algn="ctr">
+              <a:spcAft>
+                <a:spcPts val="0"/>
+              </a:spcAft>
+            </a:pPr>
+            <a:r>
+              <a:rPr sz="1050" b="0" i="0">
+                <a:solidFill>
+                  <a:srgbClr val="B4C7D2"/>
+                </a:solidFill>
+                <a:latin typeface="Arial"/>
+              </a:rPr>
+              <a:t>0.10</a:t>
+            </a:r>
+          </a:p>
+        </p:txBody>
+      </p:sp>
       <p:cxnSp>
         <p:nvCxnSpPr>
           <p:cNvPr id="51" name="C4-E09 line 49" descr="sci-ppt:o049"/>
@@ -4200,15 +4804,15 @@
         </p:nvCxnSpPr>
         <p:spPr>
           <a:xfrm>
-            <a:off x="5609844" y="1748906"/>
-            <a:ext cx="96012" cy="16953"/>
+            <a:off x="7068312" y="4846320"/>
+            <a:ext cx="64008" cy="0"/>
           </a:xfrm>
           <a:prstGeom prst="line">
             <a:avLst/>
           </a:prstGeom>
-          <a:ln w="25400">
+          <a:ln w="12700">
             <a:solidFill>
-              <a:srgbClr val="8EDBD4"/>
+              <a:srgbClr val="B4C7D2"/>
             </a:solidFill>
           </a:ln>
           <a:effectLst/>
@@ -4222,15 +4826,15 @@
         </p:nvCxnSpPr>
         <p:spPr>
           <a:xfrm>
-            <a:off x="5705856" y="1765859"/>
-            <a:ext cx="96012" cy="18892"/>
+            <a:off x="7068312" y="3456432"/>
+            <a:ext cx="64008" cy="0"/>
           </a:xfrm>
           <a:prstGeom prst="line">
             <a:avLst/>
           </a:prstGeom>
-          <a:ln w="25400">
+          <a:ln w="12700">
             <a:solidFill>
-              <a:srgbClr val="8EDBD4"/>
+              <a:srgbClr val="B4C7D2"/>
             </a:solidFill>
           </a:ln>
           <a:effectLst/>
@@ -4244,42 +4848,60 @@
         </p:nvCxnSpPr>
         <p:spPr>
           <a:xfrm>
-            <a:off x="5801868" y="1784751"/>
-            <a:ext cx="96012" cy="20713"/>
+            <a:off x="7132320" y="3456432"/>
+            <a:ext cx="4663439" cy="0"/>
           </a:xfrm>
           <a:prstGeom prst="line">
             <a:avLst/>
           </a:prstGeom>
-          <a:ln w="25400">
+          <a:ln w="7620">
             <a:solidFill>
-              <a:srgbClr val="8EDBD4"/>
+              <a:srgbClr val="2E4756"/>
             </a:solidFill>
           </a:ln>
           <a:effectLst/>
         </p:spPr>
       </p:cxnSp>
-      <p:cxnSp>
-        <p:nvCxnSpPr>
-          <p:cNvPr id="54" name="C4-E09 line 52" descr="sci-ppt:o052"/>
-          <p:cNvCxnSpPr/>
-          <p:nvPr/>
-        </p:nvCxnSpPr>
-        <p:spPr>
-          <a:xfrm>
-            <a:off x="5897880" y="1805464"/>
-            <a:ext cx="96012" cy="22407"/>
-          </a:xfrm>
-          <a:prstGeom prst="line">
-            <a:avLst/>
-          </a:prstGeom>
-          <a:ln w="25400">
-            <a:solidFill>
-              <a:srgbClr val="8EDBD4"/>
-            </a:solidFill>
-          </a:ln>
-          <a:effectLst/>
-        </p:spPr>
-      </p:cxnSp>
+      <p:sp>
+        <p:nvSpPr>
+          <p:cNvPr id="54" name="C4-E09 text 52" descr="sci-ppt:o052"/>
+          <p:cNvSpPr txBox="1"/>
+          <p:nvPr/>
+        </p:nvSpPr>
+        <p:spPr>
+          <a:xfrm>
+            <a:off x="6263640" y="3374136"/>
+            <a:ext cx="777240" cy="208407"/>
+          </a:xfrm>
+          <a:prstGeom prst="rect">
+            <a:avLst/>
+          </a:prstGeom>
+          <a:noFill/>
+          <a:effectLst/>
+        </p:spPr>
+        <p:txBody>
+          <a:bodyPr wrap="none" lIns="18288" rIns="18288" tIns="18288" bIns="18288" anchor="t">
+            <a:spAutoFit/>
+          </a:bodyPr>
+          <a:lstStyle/>
+          <a:p>
+            <a:pPr algn="r">
+              <a:spcAft>
+                <a:spcPts val="0"/>
+              </a:spcAft>
+            </a:pPr>
+            <a:r>
+              <a:rPr sz="1050" b="0" i="0">
+                <a:solidFill>
+                  <a:srgbClr val="B4C7D2"/>
+                </a:solidFill>
+                <a:latin typeface="Arial"/>
+              </a:rPr>
+              <a:t>0.1</a:t>
+            </a:r>
+          </a:p>
+        </p:txBody>
+      </p:sp>
       <p:cxnSp>
         <p:nvCxnSpPr>
           <p:cNvPr id="55" name="C4-E09 line 53" descr="sci-ppt:o053"/>
@@ -4288,15 +4910,15 @@
         </p:nvCxnSpPr>
         <p:spPr>
           <a:xfrm>
-            <a:off x="5993892" y="1827871"/>
-            <a:ext cx="96012" cy="23963"/>
+            <a:off x="7068312" y="2066543"/>
+            <a:ext cx="64008" cy="0"/>
           </a:xfrm>
           <a:prstGeom prst="line">
             <a:avLst/>
           </a:prstGeom>
-          <a:ln w="25400">
+          <a:ln w="12700">
             <a:solidFill>
-              <a:srgbClr val="8EDBD4"/>
+              <a:srgbClr val="B4C7D2"/>
             </a:solidFill>
           </a:ln>
           <a:effectLst/>
@@ -4310,784 +4932,110 @@
         </p:nvCxnSpPr>
         <p:spPr>
           <a:xfrm>
-            <a:off x="6089904" y="1851834"/>
-            <a:ext cx="96012" cy="25372"/>
+            <a:off x="7132320" y="2066543"/>
+            <a:ext cx="4663439" cy="0"/>
           </a:xfrm>
           <a:prstGeom prst="line">
             <a:avLst/>
           </a:prstGeom>
-          <a:ln w="25400">
+          <a:ln w="7620">
             <a:solidFill>
-              <a:srgbClr val="8EDBD4"/>
+              <a:srgbClr val="2E4756"/>
             </a:solidFill>
           </a:ln>
           <a:effectLst/>
         </p:spPr>
       </p:cxnSp>
-      <p:cxnSp>
-        <p:nvCxnSpPr>
-          <p:cNvPr id="57" name="C4-E09 line 55" descr="sci-ppt:o055"/>
-          <p:cNvCxnSpPr/>
-          <p:nvPr/>
-        </p:nvCxnSpPr>
-        <p:spPr>
-          <a:xfrm>
-            <a:off x="6185916" y="1877206"/>
-            <a:ext cx="96012" cy="26624"/>
-          </a:xfrm>
-          <a:prstGeom prst="line">
-            <a:avLst/>
-          </a:prstGeom>
-          <a:ln w="25400">
-            <a:solidFill>
-              <a:srgbClr val="8EDBD4"/>
-            </a:solidFill>
-          </a:ln>
-          <a:effectLst/>
-        </p:spPr>
-      </p:cxnSp>
-      <p:cxnSp>
-        <p:nvCxnSpPr>
-          <p:cNvPr id="58" name="C4-E09 line 56" descr="sci-ppt:o056"/>
-          <p:cNvCxnSpPr/>
-          <p:nvPr/>
-        </p:nvCxnSpPr>
-        <p:spPr>
-          <a:xfrm>
-            <a:off x="6281928" y="1903830"/>
-            <a:ext cx="96012" cy="27711"/>
-          </a:xfrm>
-          <a:prstGeom prst="line">
-            <a:avLst/>
-          </a:prstGeom>
-          <a:ln w="25400">
-            <a:solidFill>
-              <a:srgbClr val="8EDBD4"/>
-            </a:solidFill>
-          </a:ln>
-          <a:effectLst/>
-        </p:spPr>
-      </p:cxnSp>
-      <p:cxnSp>
-        <p:nvCxnSpPr>
-          <p:cNvPr id="59" name="C4-E09 line 57" descr="sci-ppt:o057"/>
-          <p:cNvCxnSpPr/>
-          <p:nvPr/>
-        </p:nvCxnSpPr>
-        <p:spPr>
-          <a:xfrm>
-            <a:off x="6377940" y="1931541"/>
-            <a:ext cx="96012" cy="28628"/>
-          </a:xfrm>
-          <a:prstGeom prst="line">
-            <a:avLst/>
-          </a:prstGeom>
-          <a:ln w="25400">
-            <a:solidFill>
-              <a:srgbClr val="8EDBD4"/>
-            </a:solidFill>
-          </a:ln>
-          <a:effectLst/>
-        </p:spPr>
-      </p:cxnSp>
-      <p:cxnSp>
-        <p:nvCxnSpPr>
-          <p:cNvPr id="60" name="C4-E09 line 58" descr="sci-ppt:o058"/>
-          <p:cNvCxnSpPr/>
-          <p:nvPr/>
-        </p:nvCxnSpPr>
-        <p:spPr>
-          <a:xfrm>
-            <a:off x="6473952" y="1960169"/>
-            <a:ext cx="96012" cy="29369"/>
-          </a:xfrm>
-          <a:prstGeom prst="line">
-            <a:avLst/>
-          </a:prstGeom>
-          <a:ln w="25400">
-            <a:solidFill>
-              <a:srgbClr val="8EDBD4"/>
-            </a:solidFill>
-          </a:ln>
-          <a:effectLst/>
-        </p:spPr>
-      </p:cxnSp>
-      <p:cxnSp>
-        <p:nvCxnSpPr>
-          <p:cNvPr id="61" name="C4-E09 line 59" descr="sci-ppt:o059"/>
-          <p:cNvCxnSpPr/>
-          <p:nvPr/>
-        </p:nvCxnSpPr>
-        <p:spPr>
-          <a:xfrm>
-            <a:off x="6569964" y="1989538"/>
-            <a:ext cx="96012" cy="29928"/>
-          </a:xfrm>
-          <a:prstGeom prst="line">
-            <a:avLst/>
-          </a:prstGeom>
-          <a:ln w="25400">
-            <a:solidFill>
-              <a:srgbClr val="8EDBD4"/>
-            </a:solidFill>
-          </a:ln>
-          <a:effectLst/>
-        </p:spPr>
-      </p:cxnSp>
-      <p:cxnSp>
-        <p:nvCxnSpPr>
-          <p:cNvPr id="62" name="C4-E09 line 60" descr="sci-ppt:o060"/>
-          <p:cNvCxnSpPr/>
-          <p:nvPr/>
-        </p:nvCxnSpPr>
-        <p:spPr>
-          <a:xfrm>
-            <a:off x="6665976" y="2019466"/>
-            <a:ext cx="96012" cy="30303"/>
-          </a:xfrm>
-          <a:prstGeom prst="line">
-            <a:avLst/>
-          </a:prstGeom>
-          <a:ln w="25400">
-            <a:solidFill>
-              <a:srgbClr val="8EDBD4"/>
-            </a:solidFill>
-          </a:ln>
-          <a:effectLst/>
-        </p:spPr>
-      </p:cxnSp>
-      <p:cxnSp>
-        <p:nvCxnSpPr>
-          <p:cNvPr id="63" name="C4-E09 line 61" descr="sci-ppt:o061"/>
-          <p:cNvCxnSpPr/>
-          <p:nvPr/>
-        </p:nvCxnSpPr>
-        <p:spPr>
-          <a:xfrm>
-            <a:off x="6761988" y="2049769"/>
-            <a:ext cx="96012" cy="30491"/>
-          </a:xfrm>
-          <a:prstGeom prst="line">
-            <a:avLst/>
-          </a:prstGeom>
-          <a:ln w="25400">
-            <a:solidFill>
-              <a:srgbClr val="8EDBD4"/>
-            </a:solidFill>
-          </a:ln>
-          <a:effectLst/>
-        </p:spPr>
-      </p:cxnSp>
-      <p:cxnSp>
-        <p:nvCxnSpPr>
-          <p:cNvPr id="64" name="C4-E09 line 62" descr="sci-ppt:o062"/>
-          <p:cNvCxnSpPr/>
-          <p:nvPr/>
-        </p:nvCxnSpPr>
-        <p:spPr>
-          <a:xfrm>
-            <a:off x="6858000" y="2080260"/>
-            <a:ext cx="96012" cy="30490"/>
-          </a:xfrm>
-          <a:prstGeom prst="line">
-            <a:avLst/>
-          </a:prstGeom>
-          <a:ln w="25400">
-            <a:solidFill>
-              <a:srgbClr val="8EDBD4"/>
-            </a:solidFill>
-          </a:ln>
-          <a:effectLst/>
-        </p:spPr>
-      </p:cxnSp>
-      <p:cxnSp>
-        <p:nvCxnSpPr>
-          <p:cNvPr id="65" name="C4-E09 line 63" descr="sci-ppt:o063"/>
-          <p:cNvCxnSpPr/>
-          <p:nvPr/>
-        </p:nvCxnSpPr>
-        <p:spPr>
-          <a:xfrm>
-            <a:off x="6954012" y="2110750"/>
-            <a:ext cx="96012" cy="30303"/>
-          </a:xfrm>
-          <a:prstGeom prst="line">
-            <a:avLst/>
-          </a:prstGeom>
-          <a:ln w="25400">
-            <a:solidFill>
-              <a:srgbClr val="8EDBD4"/>
-            </a:solidFill>
-          </a:ln>
-          <a:effectLst/>
-        </p:spPr>
-      </p:cxnSp>
-      <p:cxnSp>
-        <p:nvCxnSpPr>
-          <p:cNvPr id="66" name="C4-E09 line 64" descr="sci-ppt:o064"/>
-          <p:cNvCxnSpPr/>
-          <p:nvPr/>
-        </p:nvCxnSpPr>
-        <p:spPr>
-          <a:xfrm>
-            <a:off x="7050024" y="2141053"/>
-            <a:ext cx="96012" cy="29928"/>
-          </a:xfrm>
-          <a:prstGeom prst="line">
-            <a:avLst/>
-          </a:prstGeom>
-          <a:ln w="25400">
-            <a:solidFill>
-              <a:srgbClr val="8EDBD4"/>
-            </a:solidFill>
-          </a:ln>
-          <a:effectLst/>
-        </p:spPr>
-      </p:cxnSp>
-      <p:cxnSp>
-        <p:nvCxnSpPr>
-          <p:cNvPr id="67" name="C4-E09 line 65" descr="sci-ppt:o065"/>
-          <p:cNvCxnSpPr/>
-          <p:nvPr/>
-        </p:nvCxnSpPr>
-        <p:spPr>
-          <a:xfrm>
-            <a:off x="7146036" y="2170981"/>
-            <a:ext cx="96012" cy="29369"/>
-          </a:xfrm>
-          <a:prstGeom prst="line">
-            <a:avLst/>
-          </a:prstGeom>
-          <a:ln w="25400">
-            <a:solidFill>
-              <a:srgbClr val="8EDBD4"/>
-            </a:solidFill>
-          </a:ln>
-          <a:effectLst/>
-        </p:spPr>
-      </p:cxnSp>
-      <p:cxnSp>
-        <p:nvCxnSpPr>
-          <p:cNvPr id="68" name="C4-E09 line 66" descr="sci-ppt:o066"/>
-          <p:cNvCxnSpPr/>
-          <p:nvPr/>
-        </p:nvCxnSpPr>
-        <p:spPr>
-          <a:xfrm>
-            <a:off x="7242048" y="2200350"/>
-            <a:ext cx="96012" cy="28628"/>
-          </a:xfrm>
-          <a:prstGeom prst="line">
-            <a:avLst/>
-          </a:prstGeom>
-          <a:ln w="25400">
-            <a:solidFill>
-              <a:srgbClr val="8EDBD4"/>
-            </a:solidFill>
-          </a:ln>
-          <a:effectLst/>
-        </p:spPr>
-      </p:cxnSp>
-      <p:cxnSp>
-        <p:nvCxnSpPr>
-          <p:cNvPr id="69" name="C4-E09 line 67" descr="sci-ppt:o067"/>
-          <p:cNvCxnSpPr/>
-          <p:nvPr/>
-        </p:nvCxnSpPr>
-        <p:spPr>
-          <a:xfrm>
-            <a:off x="7338060" y="2228978"/>
-            <a:ext cx="96011" cy="27711"/>
-          </a:xfrm>
-          <a:prstGeom prst="line">
-            <a:avLst/>
-          </a:prstGeom>
-          <a:ln w="25400">
-            <a:solidFill>
-              <a:srgbClr val="8EDBD4"/>
-            </a:solidFill>
-          </a:ln>
-          <a:effectLst/>
-        </p:spPr>
-      </p:cxnSp>
-      <p:cxnSp>
-        <p:nvCxnSpPr>
-          <p:cNvPr id="70" name="C4-E09 line 68" descr="sci-ppt:o068"/>
-          <p:cNvCxnSpPr/>
-          <p:nvPr/>
-        </p:nvCxnSpPr>
-        <p:spPr>
-          <a:xfrm>
-            <a:off x="7434071" y="2256689"/>
-            <a:ext cx="96012" cy="26624"/>
-          </a:xfrm>
-          <a:prstGeom prst="line">
-            <a:avLst/>
-          </a:prstGeom>
-          <a:ln w="25400">
-            <a:solidFill>
-              <a:srgbClr val="8EDBD4"/>
-            </a:solidFill>
-          </a:ln>
-          <a:effectLst/>
-        </p:spPr>
-      </p:cxnSp>
-      <p:cxnSp>
-        <p:nvCxnSpPr>
-          <p:cNvPr id="71" name="C4-E09 line 69" descr="sci-ppt:o069"/>
-          <p:cNvCxnSpPr/>
-          <p:nvPr/>
-        </p:nvCxnSpPr>
-        <p:spPr>
-          <a:xfrm>
-            <a:off x="7530083" y="2283313"/>
-            <a:ext cx="96013" cy="25372"/>
-          </a:xfrm>
-          <a:prstGeom prst="line">
-            <a:avLst/>
-          </a:prstGeom>
-          <a:ln w="25400">
-            <a:solidFill>
-              <a:srgbClr val="8EDBD4"/>
-            </a:solidFill>
-          </a:ln>
-          <a:effectLst/>
-        </p:spPr>
-      </p:cxnSp>
-      <p:cxnSp>
-        <p:nvCxnSpPr>
-          <p:cNvPr id="72" name="C4-E09 line 70" descr="sci-ppt:o070"/>
-          <p:cNvCxnSpPr/>
-          <p:nvPr/>
-        </p:nvCxnSpPr>
-        <p:spPr>
-          <a:xfrm>
-            <a:off x="7626096" y="2308685"/>
-            <a:ext cx="96012" cy="23963"/>
-          </a:xfrm>
-          <a:prstGeom prst="line">
-            <a:avLst/>
-          </a:prstGeom>
-          <a:ln w="25400">
-            <a:solidFill>
-              <a:srgbClr val="8EDBD4"/>
-            </a:solidFill>
-          </a:ln>
-          <a:effectLst/>
-        </p:spPr>
-      </p:cxnSp>
-      <p:cxnSp>
-        <p:nvCxnSpPr>
-          <p:cNvPr id="73" name="C4-E09 line 71" descr="sci-ppt:o071"/>
-          <p:cNvCxnSpPr/>
-          <p:nvPr/>
-        </p:nvCxnSpPr>
-        <p:spPr>
-          <a:xfrm>
-            <a:off x="7722108" y="2332648"/>
-            <a:ext cx="96011" cy="22407"/>
-          </a:xfrm>
-          <a:prstGeom prst="line">
-            <a:avLst/>
-          </a:prstGeom>
-          <a:ln w="25400">
-            <a:solidFill>
-              <a:srgbClr val="8EDBD4"/>
-            </a:solidFill>
-          </a:ln>
-          <a:effectLst/>
-        </p:spPr>
-      </p:cxnSp>
-      <p:cxnSp>
-        <p:nvCxnSpPr>
-          <p:cNvPr id="74" name="C4-E09 line 72" descr="sci-ppt:o072"/>
-          <p:cNvCxnSpPr/>
-          <p:nvPr/>
-        </p:nvCxnSpPr>
-        <p:spPr>
-          <a:xfrm>
-            <a:off x="7818119" y="2355055"/>
-            <a:ext cx="96012" cy="20713"/>
-          </a:xfrm>
-          <a:prstGeom prst="line">
-            <a:avLst/>
-          </a:prstGeom>
-          <a:ln w="25400">
-            <a:solidFill>
-              <a:srgbClr val="8EDBD4"/>
-            </a:solidFill>
-          </a:ln>
-          <a:effectLst/>
-        </p:spPr>
-      </p:cxnSp>
-      <p:cxnSp>
-        <p:nvCxnSpPr>
-          <p:cNvPr id="75" name="C4-E09 line 73" descr="sci-ppt:o073"/>
-          <p:cNvCxnSpPr/>
-          <p:nvPr/>
-        </p:nvCxnSpPr>
-        <p:spPr>
-          <a:xfrm>
-            <a:off x="7914131" y="2375768"/>
-            <a:ext cx="96013" cy="18892"/>
-          </a:xfrm>
-          <a:prstGeom prst="line">
-            <a:avLst/>
-          </a:prstGeom>
-          <a:ln w="25400">
-            <a:solidFill>
-              <a:srgbClr val="8EDBD4"/>
-            </a:solidFill>
-          </a:ln>
-          <a:effectLst/>
-        </p:spPr>
-      </p:cxnSp>
-      <p:cxnSp>
-        <p:nvCxnSpPr>
-          <p:cNvPr id="76" name="C4-E09 line 74" descr="sci-ppt:o074"/>
-          <p:cNvCxnSpPr/>
-          <p:nvPr/>
-        </p:nvCxnSpPr>
-        <p:spPr>
-          <a:xfrm>
-            <a:off x="8010144" y="2394660"/>
-            <a:ext cx="96012" cy="16953"/>
-          </a:xfrm>
-          <a:prstGeom prst="line">
-            <a:avLst/>
-          </a:prstGeom>
-          <a:ln w="25400">
-            <a:solidFill>
-              <a:srgbClr val="8EDBD4"/>
-            </a:solidFill>
-          </a:ln>
-          <a:effectLst/>
-        </p:spPr>
-      </p:cxnSp>
-      <p:cxnSp>
-        <p:nvCxnSpPr>
-          <p:cNvPr id="77" name="C4-E09 line 75" descr="sci-ppt:o075"/>
-          <p:cNvCxnSpPr/>
-          <p:nvPr/>
-        </p:nvCxnSpPr>
-        <p:spPr>
-          <a:xfrm>
-            <a:off x="8106156" y="2411613"/>
-            <a:ext cx="96011" cy="14909"/>
-          </a:xfrm>
-          <a:prstGeom prst="line">
-            <a:avLst/>
-          </a:prstGeom>
-          <a:ln w="25400">
-            <a:solidFill>
-              <a:srgbClr val="8EDBD4"/>
-            </a:solidFill>
-          </a:ln>
-          <a:effectLst/>
-        </p:spPr>
-      </p:cxnSp>
-      <p:cxnSp>
-        <p:nvCxnSpPr>
-          <p:cNvPr id="78" name="C4-E09 line 76" descr="sci-ppt:o076"/>
-          <p:cNvCxnSpPr/>
-          <p:nvPr/>
-        </p:nvCxnSpPr>
-        <p:spPr>
-          <a:xfrm>
-            <a:off x="8202167" y="2426522"/>
-            <a:ext cx="96012" cy="12776"/>
-          </a:xfrm>
-          <a:prstGeom prst="line">
-            <a:avLst/>
-          </a:prstGeom>
-          <a:ln w="25400">
-            <a:solidFill>
-              <a:srgbClr val="8EDBD4"/>
-            </a:solidFill>
-          </a:ln>
-          <a:effectLst/>
-        </p:spPr>
-      </p:cxnSp>
-      <p:cxnSp>
-        <p:nvCxnSpPr>
-          <p:cNvPr id="79" name="C4-E09 line 77" descr="sci-ppt:o077"/>
-          <p:cNvCxnSpPr/>
-          <p:nvPr/>
-        </p:nvCxnSpPr>
-        <p:spPr>
-          <a:xfrm>
-            <a:off x="8298179" y="2439298"/>
-            <a:ext cx="96013" cy="10561"/>
-          </a:xfrm>
-          <a:prstGeom prst="line">
-            <a:avLst/>
-          </a:prstGeom>
-          <a:ln w="25400">
-            <a:solidFill>
-              <a:srgbClr val="8EDBD4"/>
-            </a:solidFill>
-          </a:ln>
-          <a:effectLst/>
-        </p:spPr>
-      </p:cxnSp>
-      <p:cxnSp>
-        <p:nvCxnSpPr>
-          <p:cNvPr id="80" name="C4-E09 line 78" descr="sci-ppt:o078"/>
-          <p:cNvCxnSpPr/>
-          <p:nvPr/>
-        </p:nvCxnSpPr>
-        <p:spPr>
-          <a:xfrm>
-            <a:off x="8394192" y="2449859"/>
-            <a:ext cx="96011" cy="8283"/>
-          </a:xfrm>
-          <a:prstGeom prst="line">
-            <a:avLst/>
-          </a:prstGeom>
-          <a:ln w="25400">
-            <a:solidFill>
-              <a:srgbClr val="8EDBD4"/>
-            </a:solidFill>
-          </a:ln>
-          <a:effectLst/>
-        </p:spPr>
-      </p:cxnSp>
-      <p:cxnSp>
-        <p:nvCxnSpPr>
-          <p:cNvPr id="81" name="C4-E09 line 79" descr="sci-ppt:o079"/>
-          <p:cNvCxnSpPr/>
-          <p:nvPr/>
-        </p:nvCxnSpPr>
-        <p:spPr>
-          <a:xfrm>
-            <a:off x="8490203" y="2458142"/>
-            <a:ext cx="96012" cy="5953"/>
-          </a:xfrm>
-          <a:prstGeom prst="line">
-            <a:avLst/>
-          </a:prstGeom>
-          <a:ln w="25400">
-            <a:solidFill>
-              <a:srgbClr val="8EDBD4"/>
-            </a:solidFill>
-          </a:ln>
-          <a:effectLst/>
-        </p:spPr>
-      </p:cxnSp>
-      <p:cxnSp>
-        <p:nvCxnSpPr>
-          <p:cNvPr id="82" name="C4-E09 line 80" descr="sci-ppt:o080"/>
-          <p:cNvCxnSpPr/>
-          <p:nvPr/>
-        </p:nvCxnSpPr>
-        <p:spPr>
-          <a:xfrm>
-            <a:off x="8586215" y="2464095"/>
-            <a:ext cx="96013" cy="3587"/>
-          </a:xfrm>
-          <a:prstGeom prst="line">
-            <a:avLst/>
-          </a:prstGeom>
-          <a:ln w="25400">
-            <a:solidFill>
-              <a:srgbClr val="8EDBD4"/>
-            </a:solidFill>
-          </a:ln>
-          <a:effectLst/>
-        </p:spPr>
-      </p:cxnSp>
-      <p:cxnSp>
-        <p:nvCxnSpPr>
-          <p:cNvPr id="83" name="C4-E09 line 81" descr="sci-ppt:o081"/>
-          <p:cNvCxnSpPr/>
-          <p:nvPr/>
-        </p:nvCxnSpPr>
-        <p:spPr>
-          <a:xfrm>
-            <a:off x="8682228" y="2467682"/>
-            <a:ext cx="96012" cy="1198"/>
-          </a:xfrm>
-          <a:prstGeom prst="line">
-            <a:avLst/>
-          </a:prstGeom>
-          <a:ln w="25400">
-            <a:solidFill>
-              <a:srgbClr val="8EDBD4"/>
-            </a:solidFill>
-          </a:ln>
-          <a:effectLst/>
-        </p:spPr>
-      </p:cxnSp>
-      <p:sp>
-        <p:nvSpPr>
-          <p:cNvPr id="84" name="C4-E09 rect 82" descr="sci-ppt:o082"/>
-          <p:cNvSpPr/>
-          <p:nvPr/>
-        </p:nvSpPr>
-        <p:spPr>
-          <a:xfrm>
-            <a:off x="868680" y="2194560"/>
-            <a:ext cx="274320" cy="548640"/>
+      <p:sp>
+        <p:nvSpPr>
+          <p:cNvPr id="57" name="C4-E09 text 55" descr="sci-ppt:o055"/>
+          <p:cNvSpPr txBox="1"/>
+          <p:nvPr/>
+        </p:nvSpPr>
+        <p:spPr>
+          <a:xfrm>
+            <a:off x="6263640" y="1984248"/>
+            <a:ext cx="777240" cy="208407"/>
           </a:xfrm>
           <a:prstGeom prst="rect">
             <a:avLst/>
           </a:prstGeom>
-          <a:solidFill>
-            <a:srgbClr val="213E4B"/>
-          </a:solidFill>
-          <a:ln w="19050">
-            <a:solidFill>
-              <a:srgbClr val="B4C7D2"/>
-            </a:solidFill>
-          </a:ln>
-          <a:effectLst/>
-        </p:spPr>
-        <p:txBody>
-          <a:bodyPr rtlCol="0" anchor="ctr"/>
-          <a:lstStyle/>
-          <a:p>
-            <a:pPr algn="ctr"/>
-          </a:p>
-        </p:txBody>
-      </p:sp>
-      <p:sp>
-        <p:nvSpPr>
-          <p:cNvPr id="85" name="C4-E09 rect 83" descr="sci-ppt:o083"/>
-          <p:cNvSpPr/>
-          <p:nvPr/>
-        </p:nvSpPr>
-        <p:spPr>
-          <a:xfrm>
-            <a:off x="8732520" y="2194560"/>
-            <a:ext cx="274320" cy="548640"/>
+          <a:noFill/>
+          <a:effectLst/>
+        </p:spPr>
+        <p:txBody>
+          <a:bodyPr wrap="none" lIns="18288" rIns="18288" tIns="18288" bIns="18288" anchor="t">
+            <a:spAutoFit/>
+          </a:bodyPr>
+          <a:lstStyle/>
+          <a:p>
+            <a:pPr algn="r">
+              <a:spcAft>
+                <a:spcPts val="0"/>
+              </a:spcAft>
+            </a:pPr>
+            <a:r>
+              <a:rPr sz="1050" b="0" i="0">
+                <a:solidFill>
+                  <a:srgbClr val="B4C7D2"/>
+                </a:solidFill>
+                <a:latin typeface="Arial"/>
+              </a:rPr>
+              <a:t>0.2</a:t>
+            </a:r>
+          </a:p>
+        </p:txBody>
+      </p:sp>
+      <p:sp>
+        <p:nvSpPr>
+          <p:cNvPr id="58" name="C4-E09 text 56" descr="sci-ppt:o056"/>
+          <p:cNvSpPr txBox="1"/>
+          <p:nvPr/>
+        </p:nvSpPr>
+        <p:spPr>
+          <a:xfrm>
+            <a:off x="7132320" y="5129783"/>
+            <a:ext cx="4663440" cy="231648"/>
           </a:xfrm>
           <a:prstGeom prst="rect">
             <a:avLst/>
           </a:prstGeom>
-          <a:solidFill>
-            <a:srgbClr val="213E4B"/>
-          </a:solidFill>
-          <a:ln w="19050">
-            <a:solidFill>
-              <a:srgbClr val="B4C7D2"/>
-            </a:solidFill>
-          </a:ln>
-          <a:effectLst/>
-        </p:spPr>
-        <p:txBody>
-          <a:bodyPr rtlCol="0" anchor="ctr"/>
-          <a:lstStyle/>
-          <a:p>
-            <a:pPr algn="ctr"/>
-          </a:p>
-        </p:txBody>
-      </p:sp>
-      <p:cxnSp>
-        <p:nvCxnSpPr>
-          <p:cNvPr id="86" name="C4-E09 arrow 84" descr="sci-ppt:o084"/>
-          <p:cNvCxnSpPr/>
-          <p:nvPr/>
-        </p:nvCxnSpPr>
-        <p:spPr>
-          <a:xfrm flipV="1">
-            <a:off x="2743200" y="2606040"/>
-            <a:ext cx="0" cy="822960"/>
-          </a:xfrm>
-          <a:prstGeom prst="line">
-            <a:avLst/>
-          </a:prstGeom>
-          <a:ln w="25400">
-            <a:solidFill>
-              <a:srgbClr val="8EDBD4"/>
-            </a:solidFill>
-            <a:headEnd type="none" w="med" len="med"/>
-            <a:tailEnd type="triangle" w="med" len="med"/>
-          </a:ln>
-          <a:effectLst/>
-        </p:spPr>
-      </p:cxnSp>
-      <p:cxnSp>
-        <p:nvCxnSpPr>
-          <p:cNvPr id="87" name="C4-E09 arrow 85" descr="sci-ppt:o085"/>
-          <p:cNvCxnSpPr/>
-          <p:nvPr/>
-        </p:nvCxnSpPr>
-        <p:spPr>
-          <a:xfrm flipV="1">
-            <a:off x="4937760" y="2606040"/>
-            <a:ext cx="0" cy="822960"/>
-          </a:xfrm>
-          <a:prstGeom prst="line">
-            <a:avLst/>
-          </a:prstGeom>
-          <a:ln w="25400">
-            <a:solidFill>
-              <a:srgbClr val="8EDBD4"/>
-            </a:solidFill>
-            <a:headEnd type="none" w="med" len="med"/>
-            <a:tailEnd type="triangle" w="med" len="med"/>
-          </a:ln>
-          <a:effectLst/>
-        </p:spPr>
-      </p:cxnSp>
-      <p:cxnSp>
-        <p:nvCxnSpPr>
-          <p:cNvPr id="88" name="C4-E09 arrow 86" descr="sci-ppt:o086"/>
-          <p:cNvCxnSpPr/>
-          <p:nvPr/>
-        </p:nvCxnSpPr>
-        <p:spPr>
-          <a:xfrm flipV="1">
-            <a:off x="7132320" y="2606040"/>
-            <a:ext cx="0" cy="822960"/>
-          </a:xfrm>
-          <a:prstGeom prst="line">
-            <a:avLst/>
-          </a:prstGeom>
-          <a:ln w="25400">
-            <a:solidFill>
-              <a:srgbClr val="8EDBD4"/>
-            </a:solidFill>
-            <a:headEnd type="none" w="med" len="med"/>
-            <a:tailEnd type="triangle" w="med" len="med"/>
-          </a:ln>
-          <a:effectLst/>
-        </p:spPr>
-      </p:cxnSp>
-      <p:cxnSp>
-        <p:nvCxnSpPr>
-          <p:cNvPr id="89" name="C4-E09 arrow 87" descr="sci-ppt:o087"/>
-          <p:cNvCxnSpPr/>
-          <p:nvPr/>
-        </p:nvCxnSpPr>
-        <p:spPr>
-          <a:xfrm>
-            <a:off x="4937760" y="914400"/>
-            <a:ext cx="0" cy="594360"/>
-          </a:xfrm>
-          <a:prstGeom prst="line">
-            <a:avLst/>
-          </a:prstGeom>
-          <a:ln w="25400">
-            <a:solidFill>
-              <a:srgbClr val="8EDBD4"/>
-            </a:solidFill>
-            <a:headEnd type="none" w="med" len="med"/>
-            <a:tailEnd type="triangle" w="med" len="med"/>
-          </a:ln>
-          <a:effectLst/>
-        </p:spPr>
-      </p:cxnSp>
-      <p:sp>
-        <p:nvSpPr>
-          <p:cNvPr id="90" name="C4-E09 text 88" descr="sci-ppt:o088"/>
+          <a:noFill/>
+          <a:effectLst/>
+        </p:spPr>
+        <p:txBody>
+          <a:bodyPr wrap="none" lIns="18288" rIns="18288" tIns="18288" bIns="18288" anchor="t">
+            <a:spAutoFit/>
+          </a:bodyPr>
+          <a:lstStyle/>
+          <a:p>
+            <a:pPr algn="ctr">
+              <a:spcAft>
+                <a:spcPts val="0"/>
+              </a:spcAft>
+            </a:pPr>
+            <a:r>
+              <a:rPr sz="1200" b="0" i="0">
+                <a:solidFill>
+                  <a:srgbClr val="E7F0F3"/>
+                </a:solidFill>
+                <a:latin typeface="Arial"/>
+              </a:rPr>
+              <a:t>areal impulse J_A  (N s / m²)</a:t>
+            </a:r>
+          </a:p>
+        </p:txBody>
+      </p:sp>
+      <p:sp>
+        <p:nvSpPr>
+          <p:cNvPr id="59" name="C4-E09 text 57" descr="sci-ppt:o057"/>
           <p:cNvSpPr txBox="1"/>
           <p:nvPr/>
         </p:nvSpPr>
         <p:spPr>
           <a:xfrm>
-            <a:off x="5486400" y="960120"/>
-            <a:ext cx="5486400" cy="411480"/>
+            <a:off x="6583680" y="1024128"/>
+            <a:ext cx="4663440" cy="231648"/>
           </a:xfrm>
           <a:prstGeom prst="rect">
             <a:avLst/>
@@ -5096,7 +5044,7 @@
           <a:effectLst/>
         </p:spPr>
         <p:txBody>
-          <a:bodyPr wrap="square" lIns="27432" rIns="27432" tIns="18288" bIns="18288" anchor="ctr">
+          <a:bodyPr wrap="none" lIns="18288" rIns="18288" tIns="18288" bIns="18288" anchor="t">
             <a:spAutoFit/>
           </a:bodyPr>
           <a:lstStyle/>
@@ -5107,27 +5055,365 @@
               </a:spcAft>
             </a:pPr>
             <a:r>
-              <a:rPr sz="1800" b="0" i="0">
+              <a:rPr sz="1200" b="0" i="0">
                 <a:solidFill>
                   <a:srgbClr val="E7F0F3"/>
                 </a:solidFill>
                 <a:latin typeface="Arial"/>
               </a:rPr>
-              <a:t>t_coh ↓: opening resistance</a:t>
-            </a:r>
-          </a:p>
-        </p:txBody>
-      </p:sp>
-      <p:sp>
-        <p:nvSpPr>
-          <p:cNvPr id="91" name="C4-E09 text 89" descr="sci-ppt:o089"/>
+              <a:t>𝓔_A  (J / m²)</a:t>
+            </a:r>
+          </a:p>
+        </p:txBody>
+      </p:sp>
+      <p:sp>
+        <p:nvSpPr>
+          <p:cNvPr id="60" name="C4-E09 polygon 58" descr="sci-ppt:o058"/>
+          <p:cNvSpPr/>
+          <p:nvPr/>
+        </p:nvSpPr>
+        <p:spPr>
+          <a:xfrm>
+            <a:off x="7132320" y="1863727"/>
+            <a:ext cx="4663439" cy="2982593"/>
+          </a:xfrm>
+          <a:custGeom>
+            <a:avLst/>
+            <a:gdLst/>
+            <a:ahLst/>
+            <a:cxnLst/>
+            <a:rect l="l" t="t" r="r" b="b"/>
+            <a:pathLst>
+              <a:path w="4663439" h="2982593">
+                <a:moveTo>
+                  <a:pt x="0" y="2982593"/>
+                </a:moveTo>
+                <a:lnTo>
+                  <a:pt x="47105" y="2982288"/>
+                </a:lnTo>
+                <a:lnTo>
+                  <a:pt x="94210" y="2981375"/>
+                </a:lnTo>
+                <a:lnTo>
+                  <a:pt x="141316" y="2979854"/>
+                </a:lnTo>
+                <a:lnTo>
+                  <a:pt x="188421" y="2977723"/>
+                </a:lnTo>
+                <a:lnTo>
+                  <a:pt x="235527" y="2974985"/>
+                </a:lnTo>
+                <a:lnTo>
+                  <a:pt x="282632" y="2971637"/>
+                </a:lnTo>
+                <a:lnTo>
+                  <a:pt x="329738" y="2967681"/>
+                </a:lnTo>
+                <a:lnTo>
+                  <a:pt x="376843" y="2963116"/>
+                </a:lnTo>
+                <a:lnTo>
+                  <a:pt x="423949" y="2957943"/>
+                </a:lnTo>
+                <a:lnTo>
+                  <a:pt x="471054" y="2952161"/>
+                </a:lnTo>
+                <a:lnTo>
+                  <a:pt x="518160" y="2945770"/>
+                </a:lnTo>
+                <a:lnTo>
+                  <a:pt x="565265" y="2938771"/>
+                </a:lnTo>
+                <a:lnTo>
+                  <a:pt x="612370" y="2931163"/>
+                </a:lnTo>
+                <a:lnTo>
+                  <a:pt x="659476" y="2922947"/>
+                </a:lnTo>
+                <a:lnTo>
+                  <a:pt x="706581" y="2914122"/>
+                </a:lnTo>
+                <a:lnTo>
+                  <a:pt x="753687" y="2904688"/>
+                </a:lnTo>
+                <a:lnTo>
+                  <a:pt x="800792" y="2894645"/>
+                </a:lnTo>
+                <a:lnTo>
+                  <a:pt x="847898" y="2883994"/>
+                </a:lnTo>
+                <a:lnTo>
+                  <a:pt x="895003" y="2872735"/>
+                </a:lnTo>
+                <a:lnTo>
+                  <a:pt x="942109" y="2860866"/>
+                </a:lnTo>
+                <a:lnTo>
+                  <a:pt x="989214" y="2848390"/>
+                </a:lnTo>
+                <a:lnTo>
+                  <a:pt x="1036320" y="2835304"/>
+                </a:lnTo>
+                <a:lnTo>
+                  <a:pt x="1083425" y="2821610"/>
+                </a:lnTo>
+                <a:lnTo>
+                  <a:pt x="1130530" y="2807307"/>
+                </a:lnTo>
+                <a:lnTo>
+                  <a:pt x="1177636" y="2792396"/>
+                </a:lnTo>
+                <a:lnTo>
+                  <a:pt x="1224741" y="2776875"/>
+                </a:lnTo>
+                <a:lnTo>
+                  <a:pt x="1271847" y="2760747"/>
+                </a:lnTo>
+                <a:lnTo>
+                  <a:pt x="1318952" y="2744009"/>
+                </a:lnTo>
+                <a:lnTo>
+                  <a:pt x="1366058" y="2726664"/>
+                </a:lnTo>
+                <a:lnTo>
+                  <a:pt x="1413163" y="2708709"/>
+                </a:lnTo>
+                <a:lnTo>
+                  <a:pt x="1460269" y="2690146"/>
+                </a:lnTo>
+                <a:lnTo>
+                  <a:pt x="1507374" y="2670974"/>
+                </a:lnTo>
+                <a:lnTo>
+                  <a:pt x="1554480" y="2651193"/>
+                </a:lnTo>
+                <a:lnTo>
+                  <a:pt x="1601585" y="2630804"/>
+                </a:lnTo>
+                <a:lnTo>
+                  <a:pt x="1648690" y="2609807"/>
+                </a:lnTo>
+                <a:lnTo>
+                  <a:pt x="1695796" y="2588200"/>
+                </a:lnTo>
+                <a:lnTo>
+                  <a:pt x="1742901" y="2565985"/>
+                </a:lnTo>
+                <a:lnTo>
+                  <a:pt x="1790007" y="2543161"/>
+                </a:lnTo>
+                <a:lnTo>
+                  <a:pt x="1837112" y="2519729"/>
+                </a:lnTo>
+                <a:lnTo>
+                  <a:pt x="1884218" y="2495688"/>
+                </a:lnTo>
+                <a:lnTo>
+                  <a:pt x="1931323" y="2471039"/>
+                </a:lnTo>
+                <a:lnTo>
+                  <a:pt x="1978429" y="2445781"/>
+                </a:lnTo>
+                <a:lnTo>
+                  <a:pt x="2025534" y="2419914"/>
+                </a:lnTo>
+                <a:lnTo>
+                  <a:pt x="2072640" y="2393438"/>
+                </a:lnTo>
+                <a:lnTo>
+                  <a:pt x="2119745" y="2366354"/>
+                </a:lnTo>
+                <a:lnTo>
+                  <a:pt x="2166850" y="2338662"/>
+                </a:lnTo>
+                <a:lnTo>
+                  <a:pt x="2213956" y="2310360"/>
+                </a:lnTo>
+                <a:lnTo>
+                  <a:pt x="2261061" y="2281451"/>
+                </a:lnTo>
+                <a:lnTo>
+                  <a:pt x="2308167" y="2251932"/>
+                </a:lnTo>
+                <a:lnTo>
+                  <a:pt x="2355272" y="2221805"/>
+                </a:lnTo>
+                <a:lnTo>
+                  <a:pt x="2402378" y="2191069"/>
+                </a:lnTo>
+                <a:lnTo>
+                  <a:pt x="2449483" y="2159724"/>
+                </a:lnTo>
+                <a:lnTo>
+                  <a:pt x="2496589" y="2127771"/>
+                </a:lnTo>
+                <a:lnTo>
+                  <a:pt x="2543694" y="2095210"/>
+                </a:lnTo>
+                <a:lnTo>
+                  <a:pt x="2590800" y="2062039"/>
+                </a:lnTo>
+                <a:lnTo>
+                  <a:pt x="2637905" y="2028260"/>
+                </a:lnTo>
+                <a:lnTo>
+                  <a:pt x="2685010" y="1993873"/>
+                </a:lnTo>
+                <a:lnTo>
+                  <a:pt x="2732116" y="1958877"/>
+                </a:lnTo>
+                <a:lnTo>
+                  <a:pt x="2779221" y="1923272"/>
+                </a:lnTo>
+                <a:lnTo>
+                  <a:pt x="2826327" y="1887058"/>
+                </a:lnTo>
+                <a:lnTo>
+                  <a:pt x="2873432" y="1850236"/>
+                </a:lnTo>
+                <a:lnTo>
+                  <a:pt x="2920538" y="1812805"/>
+                </a:lnTo>
+                <a:lnTo>
+                  <a:pt x="2967643" y="1774766"/>
+                </a:lnTo>
+                <a:lnTo>
+                  <a:pt x="3014749" y="1736118"/>
+                </a:lnTo>
+                <a:lnTo>
+                  <a:pt x="3061854" y="1696861"/>
+                </a:lnTo>
+                <a:lnTo>
+                  <a:pt x="3108960" y="1656996"/>
+                </a:lnTo>
+                <a:lnTo>
+                  <a:pt x="3156065" y="1616522"/>
+                </a:lnTo>
+                <a:lnTo>
+                  <a:pt x="3203170" y="1575439"/>
+                </a:lnTo>
+                <a:lnTo>
+                  <a:pt x="3250276" y="1533748"/>
+                </a:lnTo>
+                <a:lnTo>
+                  <a:pt x="3297381" y="1491449"/>
+                </a:lnTo>
+                <a:lnTo>
+                  <a:pt x="3344487" y="1448540"/>
+                </a:lnTo>
+                <a:lnTo>
+                  <a:pt x="3391592" y="1405023"/>
+                </a:lnTo>
+                <a:lnTo>
+                  <a:pt x="3438698" y="1360897"/>
+                </a:lnTo>
+                <a:lnTo>
+                  <a:pt x="3485803" y="1316163"/>
+                </a:lnTo>
+                <a:lnTo>
+                  <a:pt x="3532909" y="1270820"/>
+                </a:lnTo>
+                <a:lnTo>
+                  <a:pt x="3580014" y="1224868"/>
+                </a:lnTo>
+                <a:lnTo>
+                  <a:pt x="3627120" y="1178308"/>
+                </a:lnTo>
+                <a:lnTo>
+                  <a:pt x="3674225" y="1131139"/>
+                </a:lnTo>
+                <a:lnTo>
+                  <a:pt x="3721330" y="1083362"/>
+                </a:lnTo>
+                <a:lnTo>
+                  <a:pt x="3768436" y="1034976"/>
+                </a:lnTo>
+                <a:lnTo>
+                  <a:pt x="3815541" y="985981"/>
+                </a:lnTo>
+                <a:lnTo>
+                  <a:pt x="3862647" y="936378"/>
+                </a:lnTo>
+                <a:lnTo>
+                  <a:pt x="3909752" y="886166"/>
+                </a:lnTo>
+                <a:lnTo>
+                  <a:pt x="3956858" y="835345"/>
+                </a:lnTo>
+                <a:lnTo>
+                  <a:pt x="4003963" y="783916"/>
+                </a:lnTo>
+                <a:lnTo>
+                  <a:pt x="4051069" y="731878"/>
+                </a:lnTo>
+                <a:lnTo>
+                  <a:pt x="4098174" y="679232"/>
+                </a:lnTo>
+                <a:lnTo>
+                  <a:pt x="4145279" y="625976"/>
+                </a:lnTo>
+                <a:lnTo>
+                  <a:pt x="4192385" y="572113"/>
+                </a:lnTo>
+                <a:lnTo>
+                  <a:pt x="4239490" y="517640"/>
+                </a:lnTo>
+                <a:lnTo>
+                  <a:pt x="4286596" y="462559"/>
+                </a:lnTo>
+                <a:lnTo>
+                  <a:pt x="4333701" y="406870"/>
+                </a:lnTo>
+                <a:lnTo>
+                  <a:pt x="4380807" y="350571"/>
+                </a:lnTo>
+                <a:lnTo>
+                  <a:pt x="4427912" y="293664"/>
+                </a:lnTo>
+                <a:lnTo>
+                  <a:pt x="4475018" y="236149"/>
+                </a:lnTo>
+                <a:lnTo>
+                  <a:pt x="4522123" y="178025"/>
+                </a:lnTo>
+                <a:lnTo>
+                  <a:pt x="4569229" y="119292"/>
+                </a:lnTo>
+                <a:lnTo>
+                  <a:pt x="4616334" y="59950"/>
+                </a:lnTo>
+                <a:lnTo>
+                  <a:pt x="4663439" y="0"/>
+                </a:lnTo>
+              </a:path>
+            </a:pathLst>
+          </a:custGeom>
+          <a:noFill/>
+          <a:ln w="38100">
+            <a:solidFill>
+              <a:srgbClr val="F2B880"/>
+            </a:solidFill>
+          </a:ln>
+          <a:effectLst/>
+        </p:spPr>
+        <p:txBody>
+          <a:bodyPr rtlCol="0" anchor="ctr"/>
+          <a:lstStyle/>
+          <a:p>
+            <a:pPr algn="ctr"/>
+          </a:p>
+        </p:txBody>
+      </p:sp>
+      <p:sp>
+        <p:nvSpPr>
+          <p:cNvPr id="61" name="C4-E09 text 59" descr="sci-ppt:o059"/>
           <p:cNvSpPr txBox="1"/>
           <p:nvPr/>
         </p:nvSpPr>
         <p:spPr>
           <a:xfrm>
-            <a:off x="2194560" y="3474720"/>
-            <a:ext cx="6400800" cy="320040"/>
+            <a:off x="7438644" y="1697126"/>
+            <a:ext cx="2560320" cy="231648"/>
           </a:xfrm>
           <a:prstGeom prst="rect">
             <a:avLst/>
@@ -5136,7 +5422,7 @@
           <a:effectLst/>
         </p:spPr>
         <p:txBody>
-          <a:bodyPr wrap="square" lIns="27432" rIns="27432" tIns="18288" bIns="18288" anchor="ctr">
+          <a:bodyPr wrap="none" lIns="18288" rIns="18288" tIns="18288" bIns="18288" anchor="t">
             <a:spAutoFit/>
           </a:bodyPr>
           <a:lstStyle/>
@@ -5147,27 +5433,67 @@
               </a:spcAft>
             </a:pPr>
             <a:r>
-              <a:rPr sz="1700" b="0" i="0">
+              <a:rPr sz="1200" b="0" i="0">
+                <a:solidFill>
+                  <a:srgbClr val="F2B880"/>
+                </a:solidFill>
+                <a:latin typeface="Arial"/>
+              </a:rPr>
+              <a:t>𝓔_A = J_A² / (2m_A)</a:t>
+            </a:r>
+          </a:p>
+        </p:txBody>
+      </p:sp>
+      <p:sp>
+        <p:nvSpPr>
+          <p:cNvPr id="62" name="C4-E09 text 60" descr="sci-ppt:o060"/>
+          <p:cNvSpPr txBox="1"/>
+          <p:nvPr/>
+        </p:nvSpPr>
+        <p:spPr>
+          <a:xfrm>
+            <a:off x="914400" y="5577840"/>
+            <a:ext cx="10972800" cy="231648"/>
+          </a:xfrm>
+          <a:prstGeom prst="rect">
+            <a:avLst/>
+          </a:prstGeom>
+          <a:noFill/>
+          <a:effectLst/>
+        </p:spPr>
+        <p:txBody>
+          <a:bodyPr wrap="none" lIns="18288" rIns="18288" tIns="18288" bIns="18288" anchor="t">
+            <a:spAutoFit/>
+          </a:bodyPr>
+          <a:lstStyle/>
+          <a:p>
+            <a:pPr algn="l">
+              <a:spcAft>
+                <a:spcPts val="0"/>
+              </a:spcAft>
+            </a:pPr>
+            <a:r>
+              <a:rPr sz="1200" b="0" i="0">
                 <a:solidFill>
                   <a:srgbClr val="E7F0F3"/>
                 </a:solidFill>
                 <a:latin typeface="Arial"/>
               </a:rPr>
-              <a:t>p_load ↑: applied positive departure load</a:t>
-            </a:r>
-          </a:p>
-        </p:txBody>
-      </p:sp>
-      <p:sp>
-        <p:nvSpPr>
-          <p:cNvPr id="92" name="C4-E09 text 90" descr="sci-ppt:o090"/>
+              <a:t>Speed grows linearly with impulse, energy quadratically. Here m_A = ρ_f h_f = 23.3 g/m² (ρ_f = 2330 kg/m³, h_f = 10 µm).</a:t>
+            </a:r>
+          </a:p>
+        </p:txBody>
+      </p:sp>
+      <p:sp>
+        <p:nvSpPr>
+          <p:cNvPr id="63" name="C4-E09 text 61" descr="sci-ppt:o061"/>
           <p:cNvSpPr txBox="1"/>
           <p:nvPr/>
         </p:nvSpPr>
         <p:spPr>
           <a:xfrm>
-            <a:off x="914400" y="731520"/>
-            <a:ext cx="3657600" cy="365760"/>
+            <a:off x="914400" y="6035040"/>
+            <a:ext cx="10972800" cy="239395"/>
           </a:xfrm>
           <a:prstGeom prst="rect">
             <a:avLst/>
@@ -5176,7 +5502,7 @@
           <a:effectLst/>
         </p:spPr>
         <p:txBody>
-          <a:bodyPr wrap="square" lIns="27432" rIns="27432" tIns="18288" bIns="18288" anchor="ctr">
+          <a:bodyPr wrap="none" lIns="18288" rIns="18288" tIns="18288" bIns="18288" anchor="t">
             <a:spAutoFit/>
           </a:bodyPr>
           <a:lstStyle/>
@@ -5187,27 +5513,27 @@
               </a:spcAft>
             </a:pPr>
             <a:r>
-              <a:rPr sz="1800" b="0" i="0">
+              <a:rPr sz="1250" b="0" i="0">
                 <a:solidFill>
-                  <a:srgbClr val="E7F0F3"/>
+                  <a:srgbClr val="F2B880"/>
                 </a:solidFill>
                 <a:latin typeface="Arial"/>
               </a:rPr>
-              <a:t>Film: w ↑; fixed clamps</a:t>
-            </a:r>
-          </a:p>
-        </p:txBody>
-      </p:sp>
-      <p:sp>
-        <p:nvSpPr>
-          <p:cNvPr id="93" name="C4-E09 text 91" descr="sci-ppt:o091"/>
+              <a:t>Valid for a pulse much shorter than the plate response times (next figure); this energy may later feed deformation and fracture.</a:t>
+            </a:r>
+          </a:p>
+        </p:txBody>
+      </p:sp>
+      <p:sp>
+        <p:nvSpPr>
+          <p:cNvPr id="64" name="C4-E09 text 62" descr="sci-ppt:o062"/>
           <p:cNvSpPr txBox="1"/>
           <p:nvPr/>
         </p:nvSpPr>
         <p:spPr>
           <a:xfrm>
-            <a:off x="9326880" y="1920240"/>
-            <a:ext cx="2468880" cy="822960"/>
+            <a:off x="320040" y="6510528"/>
+            <a:ext cx="11521440" cy="200660"/>
           </a:xfrm>
           <a:prstGeom prst="rect">
             <a:avLst/>
@@ -5216,301 +5542,7 @@
           <a:effectLst/>
         </p:spPr>
         <p:txBody>
-          <a:bodyPr wrap="square" lIns="27432" rIns="27432" tIns="18288" bIns="18288" anchor="ctr">
-            <a:spAutoFit/>
-          </a:bodyPr>
-          <a:lstStyle/>
-          <a:p>
-            <a:pPr algn="l">
-              <a:spcAft>
-                <a:spcPts val="0"/>
-              </a:spcAft>
-            </a:pPr>
-            <a:r>
-              <a:rPr sz="1700" b="0" i="0">
-                <a:solidFill>
-                  <a:srgbClr val="8EDBD4"/>
-                </a:solidFill>
-                <a:latin typeface="Arial"/>
-              </a:rPr>
-              <a:t>Inertia</a:t>
-            </a:r>
-          </a:p>
-          <a:p>
-            <a:pPr algn="l">
-              <a:spcAft>
-                <a:spcPts val="0"/>
-              </a:spcAft>
-            </a:pPr>
-            <a:r>
-              <a:rPr sz="1700" b="0" i="0">
-                <a:solidFill>
-                  <a:srgbClr val="8EDBD4"/>
-                </a:solidFill>
-                <a:latin typeface="Arial"/>
-              </a:rPr>
-              <a:t>Bending</a:t>
-            </a:r>
-          </a:p>
-          <a:p>
-            <a:pPr algn="l">
-              <a:spcAft>
-                <a:spcPts val="0"/>
-              </a:spcAft>
-            </a:pPr>
-            <a:r>
-              <a:rPr sz="1700" b="0" i="0">
-                <a:solidFill>
-                  <a:srgbClr val="8EDBD4"/>
-                </a:solidFill>
-                <a:latin typeface="Arial"/>
-              </a:rPr>
-              <a:t>Pretension</a:t>
-            </a:r>
-          </a:p>
-        </p:txBody>
-      </p:sp>
-      <p:cxnSp>
-        <p:nvCxnSpPr>
-          <p:cNvPr id="94" name="C4-E09 line 92" descr="sci-ppt:o092"/>
-          <p:cNvCxnSpPr/>
-          <p:nvPr/>
-        </p:nvCxnSpPr>
-        <p:spPr>
-          <a:xfrm>
-            <a:off x="274320" y="3977639"/>
-            <a:ext cx="11612880" cy="0"/>
-          </a:xfrm>
-          <a:prstGeom prst="line">
-            <a:avLst/>
-          </a:prstGeom>
-          <a:ln w="12700">
-            <a:solidFill>
-              <a:srgbClr val="405967"/>
-            </a:solidFill>
-          </a:ln>
-          <a:effectLst/>
-        </p:spPr>
-      </p:cxnSp>
-      <p:sp>
-        <p:nvSpPr>
-          <p:cNvPr id="95" name="C4-E09 text 93" descr="sci-ppt:o093"/>
-          <p:cNvSpPr txBox="1"/>
-          <p:nvPr/>
-        </p:nvSpPr>
-        <p:spPr>
-          <a:xfrm>
-            <a:off x="320040" y="4096512"/>
-            <a:ext cx="5715000" cy="246888"/>
-          </a:xfrm>
-          <a:prstGeom prst="rect">
-            <a:avLst/>
-          </a:prstGeom>
-          <a:noFill/>
-          <a:effectLst/>
-        </p:spPr>
-        <p:txBody>
-          <a:bodyPr wrap="square" lIns="27432" rIns="27432" tIns="18288" bIns="18288" anchor="ctr">
-            <a:spAutoFit/>
-          </a:bodyPr>
-          <a:lstStyle/>
-          <a:p>
-            <a:pPr algn="l">
-              <a:spcAft>
-                <a:spcPts val="0"/>
-              </a:spcAft>
-            </a:pPr>
-            <a:r>
-              <a:rPr sz="1150" b="0" i="0">
-                <a:solidFill>
-                  <a:srgbClr val="B4C7D2"/>
-                </a:solidFill>
-                <a:latin typeface="Arial"/>
-              </a:rPr>
-              <a:t>• J_A ↑ pulse impulse</a:t>
-            </a:r>
-          </a:p>
-        </p:txBody>
-      </p:sp>
-      <p:sp>
-        <p:nvSpPr>
-          <p:cNvPr id="96" name="C4-E09 text 94" descr="sci-ppt:o094"/>
-          <p:cNvSpPr txBox="1"/>
-          <p:nvPr/>
-        </p:nvSpPr>
-        <p:spPr>
-          <a:xfrm>
-            <a:off x="6217920" y="4096512"/>
-            <a:ext cx="5715000" cy="246888"/>
-          </a:xfrm>
-          <a:prstGeom prst="rect">
-            <a:avLst/>
-          </a:prstGeom>
-          <a:noFill/>
-          <a:effectLst/>
-        </p:spPr>
-        <p:txBody>
-          <a:bodyPr wrap="square" lIns="27432" rIns="27432" tIns="18288" bIns="18288" anchor="ctr">
-            <a:spAutoFit/>
-          </a:bodyPr>
-          <a:lstStyle/>
-          <a:p>
-            <a:pPr algn="l">
-              <a:spcAft>
-                <a:spcPts val="0"/>
-              </a:spcAft>
-            </a:pPr>
-            <a:r>
-              <a:rPr sz="1150" b="0" i="0">
-                <a:solidFill>
-                  <a:srgbClr val="B4C7D2"/>
-                </a:solidFill>
-                <a:latin typeface="Arial"/>
-              </a:rPr>
-              <a:t>• m_A — areal mass</a:t>
-            </a:r>
-          </a:p>
-        </p:txBody>
-      </p:sp>
-      <p:sp>
-        <p:nvSpPr>
-          <p:cNvPr id="97" name="C4-E09 text 95" descr="sci-ppt:o095"/>
-          <p:cNvSpPr txBox="1"/>
-          <p:nvPr/>
-        </p:nvSpPr>
-        <p:spPr>
-          <a:xfrm>
-            <a:off x="320040" y="4329684"/>
-            <a:ext cx="5715000" cy="246888"/>
-          </a:xfrm>
-          <a:prstGeom prst="rect">
-            <a:avLst/>
-          </a:prstGeom>
-          <a:noFill/>
-          <a:effectLst/>
-        </p:spPr>
-        <p:txBody>
-          <a:bodyPr wrap="square" lIns="27432" rIns="27432" tIns="18288" bIns="18288" anchor="ctr">
-            <a:spAutoFit/>
-          </a:bodyPr>
-          <a:lstStyle/>
-          <a:p>
-            <a:pPr algn="l">
-              <a:spcAft>
-                <a:spcPts val="0"/>
-              </a:spcAft>
-            </a:pPr>
-            <a:r>
-              <a:rPr sz="1150" b="0" i="0">
-                <a:solidFill>
-                  <a:srgbClr val="B4C7D2"/>
-                </a:solidFill>
-                <a:latin typeface="Arial"/>
-              </a:rPr>
-              <a:t>• Δẇ ↑ initial response</a:t>
-            </a:r>
-          </a:p>
-        </p:txBody>
-      </p:sp>
-      <p:sp>
-        <p:nvSpPr>
-          <p:cNvPr id="98" name="C4-E09 text 96" descr="sci-ppt:o096"/>
-          <p:cNvSpPr txBox="1"/>
-          <p:nvPr/>
-        </p:nvSpPr>
-        <p:spPr>
-          <a:xfrm>
-            <a:off x="6217920" y="4329684"/>
-            <a:ext cx="5715000" cy="246888"/>
-          </a:xfrm>
-          <a:prstGeom prst="rect">
-            <a:avLst/>
-          </a:prstGeom>
-          <a:noFill/>
-          <a:effectLst/>
-        </p:spPr>
-        <p:txBody>
-          <a:bodyPr wrap="square" lIns="27432" rIns="27432" tIns="18288" bIns="18288" anchor="ctr">
-            <a:spAutoFit/>
-          </a:bodyPr>
-          <a:lstStyle/>
-          <a:p>
-            <a:pPr algn="l">
-              <a:spcAft>
-                <a:spcPts val="0"/>
-              </a:spcAft>
-            </a:pPr>
-            <a:r>
-              <a:rPr sz="1150" b="0" i="0">
-                <a:solidFill>
-                  <a:srgbClr val="B4C7D2"/>
-                </a:solidFill>
-                <a:latin typeface="Arial"/>
-              </a:rPr>
-              <a:t>• E_A — motion energy per area</a:t>
-            </a:r>
-          </a:p>
-        </p:txBody>
-      </p:sp>
-      <p:sp>
-        <p:nvSpPr>
-          <p:cNvPr id="99" name="C4-E09 text 97" descr="sci-ppt:o097"/>
-          <p:cNvSpPr txBox="1"/>
-          <p:nvPr/>
-        </p:nvSpPr>
-        <p:spPr>
-          <a:xfrm>
-            <a:off x="320040" y="5596128"/>
-            <a:ext cx="11430000" cy="292608"/>
-          </a:xfrm>
-          <a:prstGeom prst="rect">
-            <a:avLst/>
-          </a:prstGeom>
-          <a:noFill/>
-          <a:effectLst/>
-        </p:spPr>
-        <p:txBody>
-          <a:bodyPr wrap="square" lIns="27432" rIns="27432" tIns="18288" bIns="18288" anchor="ctr">
-            <a:spAutoFit/>
-          </a:bodyPr>
-          <a:lstStyle/>
-          <a:p>
-            <a:pPr algn="l">
-              <a:spcAft>
-                <a:spcPts val="0"/>
-              </a:spcAft>
-            </a:pPr>
-            <a:r>
-              <a:rPr sz="1150" b="0" i="0">
-                <a:solidFill>
-                  <a:srgbClr val="8EDBD4"/>
-                </a:solidFill>
-                <a:latin typeface="Arial"/>
-              </a:rPr>
-              <a:t>Reaction impulses must be negligible.</a:t>
-            </a:r>
-          </a:p>
-        </p:txBody>
-      </p:sp>
-      <p:sp>
-        <p:nvSpPr>
-          <p:cNvPr id="100" name="C4-E09 text 98" descr="sci-ppt:o098"/>
-          <p:cNvSpPr txBox="1"/>
-          <p:nvPr/>
-        </p:nvSpPr>
-        <p:spPr>
-          <a:xfrm>
-            <a:off x="320040" y="6473952"/>
-            <a:ext cx="11430000" cy="256032"/>
-          </a:xfrm>
-          <a:prstGeom prst="rect">
-            <a:avLst/>
-          </a:prstGeom>
-          <a:noFill/>
-          <a:effectLst/>
-        </p:spPr>
-        <p:txBody>
-          <a:bodyPr wrap="square" lIns="27432" rIns="27432" tIns="18288" bIns="18288" anchor="ctr">
+          <a:bodyPr wrap="none" lIns="18288" rIns="18288" tIns="18288" bIns="18288" anchor="t">
             <a:spAutoFit/>
           </a:bodyPr>
           <a:lstStyle/>
@@ -5527,7 +5559,7 @@
                 </a:solidFill>
                 <a:latin typeface="Arial"/>
               </a:rPr>
-              <a:t>Model schematic; geometry is not to scale.</a:t>
+              <a:t>Short-pulse free response of Eq. C4-E09.</a:t>
             </a:r>
           </a:p>
         </p:txBody>
